--- a/presentations/Презентация.pptx
+++ b/presentations/Презентация.pptx
@@ -4,6 +4,9 @@
   <p:sldMasterIdLst>
     <p:sldMasterId id="2147483648" r:id="rId1"/>
   </p:sldMasterIdLst>
+  <p:notesMasterIdLst>
+    <p:notesMasterId r:id="rId12"/>
+  </p:notesMasterIdLst>
   <p:sldIdLst>
     <p:sldId id="256" r:id="rId2"/>
     <p:sldId id="257" r:id="rId3"/>
@@ -16,11 +19,8 @@
     <p:sldId id="264" r:id="rId10"/>
     <p:sldId id="265" r:id="rId11"/>
   </p:sldIdLst>
-  <p:notesMasterIdLst>
-    <p:notesMasterId r:id="rId12"/>
-  </p:notesMasterIdLst>
-  <p:sldSz cx="12191695" cy="6858000"/>
-  <p:notesSz cx="6858000" cy="12191695"/>
+  <p:sldSz cx="12192000" cy="6858000"/>
+  <p:notesSz cx="6858000" cy="12192000"/>
   <p:defaultTextStyle>
     <a:lvl1pPr marL="0" algn="l" defTabSz="914400" rtl="0" eaLnBrk="1" latinLnBrk="0" hangingPunct="1">
       <a:defRPr sz="1800" kern="1200">
@@ -113,6 +113,11 @@
       </a:defRPr>
     </a:lvl9pPr>
   </p:defaultTextStyle>
+  <p:extLst>
+    <p:ext uri="{EFAFB233-063F-42B5-8137-9DF3F51BA10A}">
+      <p15:sldGuideLst xmlns:p15="http://schemas.microsoft.com/office/powerpoint/2012/main"/>
+    </p:ext>
+  </p:extLst>
 </p:presentation>
 </file>
 
@@ -138,234 +143,10 @@
           <a:chExt cx="0" cy="0"/>
         </a:xfrm>
       </p:grpSpPr>
-      <p:sp>
-        <p:nvSpPr>
-          <p:cNvPr id="2" name="Header Placeholder 1"/>
-          <p:cNvSpPr>
-            <a:spLocks noGrp="1"/>
-          </p:cNvSpPr>
-          <p:nvPr>
-            <p:ph type="hdr" sz="quarter"/>
-          </p:nvPr>
-        </p:nvSpPr>
-        <p:spPr>
-          <a:xfrm>
-            <a:off x="0" y="0"/>
-            <a:ext cx="2971800" cy="458788"/>
-          </a:xfrm>
-          <a:prstGeom prst="rect">
-            <a:avLst/>
-          </a:prstGeom>
-        </p:spPr>
-        <p:txBody>
-          <a:bodyPr vert="horz" lIns="91440" tIns="45720" rIns="91440" bIns="45720" rtlCol="0"/>
-          <a:lstStyle>
-            <a:lvl1pPr algn="l">
-              <a:defRPr sz="1200"/>
-            </a:lvl1pPr>
-          </a:lstStyle>
-          <a:p>
-            <a:endParaRPr lang="en-US"/>
-          </a:p>
-        </p:txBody>
-      </p:sp>
-      <p:sp>
-        <p:nvSpPr>
-          <p:cNvPr id="3" name="Date Placeholder 2"/>
-          <p:cNvSpPr>
-            <a:spLocks noGrp="1"/>
-          </p:cNvSpPr>
-          <p:nvPr>
-            <p:ph type="dt" idx="1"/>
-          </p:nvPr>
-        </p:nvSpPr>
-        <p:spPr>
-          <a:xfrm>
-            <a:off x="3884613" y="0"/>
-            <a:ext cx="2971800" cy="458788"/>
-          </a:xfrm>
-          <a:prstGeom prst="rect">
-            <a:avLst/>
-          </a:prstGeom>
-        </p:spPr>
-        <p:txBody>
-          <a:bodyPr vert="horz" lIns="91440" tIns="45720" rIns="91440" bIns="45720" rtlCol="0"/>
-          <a:lstStyle>
-            <a:lvl1pPr algn="r">
-              <a:defRPr sz="1200"/>
-            </a:lvl1pPr>
-          </a:lstStyle>
-          <a:p>
-            <a:fld id="{5282F153-3F37-0F45-9E97-73ACFA13230C}" type="datetimeFigureOut">
-              <a:rPr lang="en-US"/>
-              <a:t>7/23/19</a:t>
-            </a:fld>
-            <a:endParaRPr lang="en-US"/>
-          </a:p>
-        </p:txBody>
-      </p:sp>
-      <p:sp>
-        <p:nvSpPr>
-          <p:cNvPr id="4" name="Slide Image Placeholder 3"/>
-          <p:cNvSpPr>
-            <a:spLocks noGrp="1" noRot="1" noChangeAspect="1"/>
-          </p:cNvSpPr>
-          <p:nvPr>
-            <p:ph type="sldImg" idx="2"/>
-          </p:nvPr>
-        </p:nvSpPr>
-        <p:spPr>
-          <a:xfrm>
-            <a:off x="685800" y="1143000"/>
-            <a:ext cx="5486400" cy="3086100"/>
-          </a:xfrm>
-          <a:prstGeom prst="rect">
-            <a:avLst/>
-          </a:prstGeom>
-          <a:noFill/>
-          <a:ln w="12700">
-            <a:solidFill>
-              <a:prstClr val="black"/>
-            </a:solidFill>
-          </a:ln>
-        </p:spPr>
-        <p:txBody>
-          <a:bodyPr vert="horz" lIns="91440" tIns="45720" rIns="91440" bIns="45720" rtlCol="0" anchor="ctr"/>
-          <a:lstStyle/>
-          <a:p>
-            <a:endParaRPr lang="en-US"/>
-          </a:p>
-        </p:txBody>
-      </p:sp>
-      <p:sp>
-        <p:nvSpPr>
-          <p:cNvPr id="5" name="Notes Placeholder 4"/>
-          <p:cNvSpPr>
-            <a:spLocks noGrp="1"/>
-          </p:cNvSpPr>
-          <p:nvPr>
-            <p:ph type="body" sz="quarter" idx="3"/>
-          </p:nvPr>
-        </p:nvSpPr>
-        <p:spPr>
-          <a:xfrm>
-            <a:off x="685800" y="4400550"/>
-            <a:ext cx="5486400" cy="3600450"/>
-          </a:xfrm>
-          <a:prstGeom prst="rect">
-            <a:avLst/>
-          </a:prstGeom>
-        </p:spPr>
-        <p:txBody>
-          <a:bodyPr vert="horz" lIns="91440" tIns="45720" rIns="91440" bIns="45720" rtlCol="0"/>
-          <a:lstStyle/>
-          <a:p>
-            <a:pPr lvl="0"/>
-            <a:r>
-              <a:rPr lang="en-US"/>
-              <a:t>Click to edit Master text styles</a:t>
-            </a:r>
-          </a:p>
-          <a:p>
-            <a:pPr lvl="1"/>
-            <a:r>
-              <a:rPr lang="en-US"/>
-              <a:t>Second level</a:t>
-            </a:r>
-          </a:p>
-          <a:p>
-            <a:pPr lvl="2"/>
-            <a:r>
-              <a:rPr lang="en-US"/>
-              <a:t>Third level</a:t>
-            </a:r>
-          </a:p>
-          <a:p>
-            <a:pPr lvl="3"/>
-            <a:r>
-              <a:rPr lang="en-US"/>
-              <a:t>Fourth level</a:t>
-            </a:r>
-          </a:p>
-          <a:p>
-            <a:pPr lvl="4"/>
-            <a:r>
-              <a:rPr lang="en-US"/>
-              <a:t>Fifth level</a:t>
-            </a:r>
-          </a:p>
-        </p:txBody>
-      </p:sp>
-      <p:sp>
-        <p:nvSpPr>
-          <p:cNvPr id="6" name="Footer Placeholder 5"/>
-          <p:cNvSpPr>
-            <a:spLocks noGrp="1"/>
-          </p:cNvSpPr>
-          <p:nvPr>
-            <p:ph type="ftr" sz="quarter" idx="4"/>
-          </p:nvPr>
-        </p:nvSpPr>
-        <p:spPr>
-          <a:xfrm>
-            <a:off x="0" y="8685213"/>
-            <a:ext cx="2971800" cy="458787"/>
-          </a:xfrm>
-          <a:prstGeom prst="rect">
-            <a:avLst/>
-          </a:prstGeom>
-        </p:spPr>
-        <p:txBody>
-          <a:bodyPr vert="horz" lIns="91440" tIns="45720" rIns="91440" bIns="45720" rtlCol="0" anchor="b"/>
-          <a:lstStyle>
-            <a:lvl1pPr algn="l">
-              <a:defRPr sz="1200"/>
-            </a:lvl1pPr>
-          </a:lstStyle>
-          <a:p>
-            <a:endParaRPr lang="en-US"/>
-          </a:p>
-        </p:txBody>
-      </p:sp>
-      <p:sp>
-        <p:nvSpPr>
-          <p:cNvPr id="7" name="Slide Number Placeholder 6"/>
-          <p:cNvSpPr>
-            <a:spLocks noGrp="1"/>
-          </p:cNvSpPr>
-          <p:nvPr>
-            <p:ph type="sldNum" sz="quarter" idx="5"/>
-          </p:nvPr>
-        </p:nvSpPr>
-        <p:spPr>
-          <a:xfrm>
-            <a:off x="3884613" y="8685213"/>
-            <a:ext cx="2971800" cy="458787"/>
-          </a:xfrm>
-          <a:prstGeom prst="rect">
-            <a:avLst/>
-          </a:prstGeom>
-        </p:spPr>
-        <p:txBody>
-          <a:bodyPr vert="horz" lIns="91440" tIns="45720" rIns="91440" bIns="45720" rtlCol="0" anchor="b"/>
-          <a:lstStyle>
-            <a:lvl1pPr algn="r">
-              <a:defRPr sz="1200"/>
-            </a:lvl1pPr>
-          </a:lstStyle>
-          <a:p>
-            <a:fld id="{CE5E9CC1-C706-0F49-92D6-E571CC5EEA8F}" type="slidenum">
-              <a:rPr lang="en-US"/>
-              <a:t>‹#›</a:t>
-            </a:fld>
-            <a:endParaRPr lang="en-US"/>
-          </a:p>
-        </p:txBody>
-      </p:sp>
     </p:spTree>
     <p:extLst>
       <p:ext uri="{BB962C8B-B14F-4D97-AF65-F5344CB8AC3E}">
-        <p14:creationId xmlns:p14="http://schemas.microsoft.com/office/powerpoint/2010/main" val="1024086991"/>
+        <p14:creationId xmlns:p14="http://schemas.microsoft.com/office/powerpoint/2010/main" val="637997152"/>
       </p:ext>
     </p:extLst>
   </p:cSld>
@@ -516,7 +297,6 @@
 - DEMO guide: https://raw.githubusercontent.com/MuhametaliSagiden/KMGDIGITALHACKATONCS-404-406-demo/main/DEMO-%D0%96%D0%AE%D0%A0%D0%98-%D0%9D%D0%90%D0%A7%D0%9D%D0%98-%D0%97%D0%94%D0%95%D0%A1%D0%AC.md
 - Project/TZ reconciliation: https://raw.githubusercontent.com/MuhametaliSagiden/KMGDIGITALHACKATONCS-404-406-demo/main/%D0%A1%D0%92%D0%95%D0%A0%D0%9A%D0%90-%D0%9F%D0%A0%D0%9E%D0%95%D0%9A%D0%A2%D0%9E%D0%92-%D0%A1-%D0%A2%D0%97-%D0%98-%D0%9F%D0%A0%D0%95%D0%97%D0%95%D0%9D%D0%A2%D0%90%D0%A6%D0%98%D0%95%D0%99.md</a:t>
             </a:r>
-            <a:endParaRPr lang="en-US" dirty="0"/>
           </a:p>
         </p:txBody>
       </p:sp>
@@ -606,7 +386,6 @@
 [Sources]
 - Project/TZ reconciliation limitations: https://raw.githubusercontent.com/MuhametaliSagiden/KMGDIGITALHACKATONCS-404-406-demo/main/%D0%A1%D0%92%D0%95%D0%A0%D0%9A%D0%90-%D0%9F%D0%A0%D0%9E%D0%95%D0%9A%D0%A2%D0%9E%D0%92-%D0%A1-%D0%A2%D0%97-%D0%98-%D0%9F%D0%A0%D0%95%D0%97%D0%95%D0%9D%D0%A2%D0%90%D0%A6%D0%98%D0%95%D0%99.md</a:t>
             </a:r>
-            <a:endParaRPr lang="en-US" dirty="0"/>
           </a:p>
         </p:txBody>
       </p:sp>
@@ -696,7 +475,6 @@
 [Sources]
 - Project/TZ reconciliation lines about both modules covering MVP: https://raw.githubusercontent.com/MuhametaliSagiden/KMGDIGITALHACKATONCS-404-406-demo/main/%D0%A1%D0%92%D0%95%D0%A0%D0%9A%D0%90-%D0%9F%D0%A0%D0%9E%D0%95%D0%9A%D0%A2%D0%9E%D0%92-%D0%A1-%D0%A2%D0%97-%D0%98-%D0%9F%D0%A0%D0%95%D0%97%D0%95%D0%9D%D0%A2%D0%90%D0%A6%D0%98%D0%95%D0%99.md</a:t>
             </a:r>
-            <a:endParaRPr lang="en-US" dirty="0"/>
           </a:p>
         </p:txBody>
       </p:sp>
@@ -787,7 +565,6 @@
 - Demo guide Identity steps and addresses: https://raw.githubusercontent.com/MuhametaliSagiden/KMGDIGITALHACKATONCS-404-406-demo/main/DEMO-%D0%96%D0%AE%D0%A0%D0%98-%D0%9D%D0%90%D0%A7%D0%9D%D0%98-%D0%97%D0%94%D0%95%D0%A1%D0%AC.md
 - Reconciliation Identity features: https://raw.githubusercontent.com/MuhametaliSagiden/KMGDIGITALHACKATONCS-404-406-demo/main/%D0%A1%D0%92%D0%95%D0%A0%D0%9A%D0%90-%D0%9F%D0%A0%D0%9E%D0%95%D0%9A%D0%A2%D0%9E%D0%92-%D0%A1-%D0%A2%D0%97-%D0%98-%D0%9F%D0%A0%D0%95%D0%97%D0%95%D0%9D%D0%A2%D0%90%D0%A6%D0%98%D0%95%D0%99.md</a:t>
             </a:r>
-            <a:endParaRPr lang="en-US" dirty="0"/>
           </a:p>
         </p:txBody>
       </p:sp>
@@ -877,7 +654,6 @@
 [Sources]
 - Demo guide detailed steps: https://raw.githubusercontent.com/MuhametaliSagiden/KMGDIGITALHACKATONCS-404-406-demo/main/DEMO-%D0%96%D0%AE%D0%A0%D0%98-%D0%9D%D0%90%D0%A7%D0%9D%D0%98-%D0%97%D0%94%D0%95%D0%A1%D0%AC.md</a:t>
             </a:r>
-            <a:endParaRPr lang="en-US" dirty="0"/>
           </a:p>
         </p:txBody>
       </p:sp>
@@ -968,7 +744,6 @@
 - Certificate Radar README: https://raw.githubusercontent.com/MuhametaliSagiden/KMGDIGITALHACKATONCS-404-406-demo/main/hackatonProject2/README.md
 - Project/TZ reconciliation Certificate Radar features: https://raw.githubusercontent.com/MuhametaliSagiden/KMGDIGITALHACKATONCS-404-406-demo/main/%D0%A1%D0%92%D0%95%D0%A0%D0%9A%D0%90-%D0%9F%D0%A0%D0%9E%D0%95%D0%9A%D0%A2%D0%9E%D0%92-%D0%A1-%D0%A2%D0%97-%D0%98-%D0%9F%D0%A0%D0%95%D0%97%D0%95%D0%9D%D0%A2%D0%90%D0%A6%D0%98%D0%95%D0%99.md</a:t>
             </a:r>
-            <a:endParaRPr lang="en-US" dirty="0"/>
           </a:p>
         </p:txBody>
       </p:sp>
@@ -1059,7 +834,6 @@
 - Demo guide Certificate Radar steps: https://raw.githubusercontent.com/MuhametaliSagiden/KMGDIGITALHACKATONCS-404-406-demo/main/DEMO-%D0%96%D0%AE%D0%A0%D0%98-%D0%9D%D0%90%D0%A7%D0%9D%D0%98-%D0%97%D0%94%D0%95%D0%A1%D0%AC.md
 - Certificate Radar README: https://raw.githubusercontent.com/MuhametaliSagiden/KMGDIGITALHACKATONCS-404-406-demo/main/hackatonProject2/README.md</a:t>
             </a:r>
-            <a:endParaRPr lang="en-US" dirty="0"/>
           </a:p>
         </p:txBody>
       </p:sp>
@@ -1149,7 +923,6 @@
 [Sources]
 - Demo guide with timing context: https://raw.githubusercontent.com/MuhametaliSagiden/KMGDIGITALHACKATONCS-404-406-demo/main/DEMO-%D0%96%D0%AE%D0%A0%D0%98-%D0%9D%D0%90%D0%A7%D0%9D%D0%98-%D0%97%D0%94%D0%95%D0%A1%D0%AC.md</a:t>
             </a:r>
-            <a:endParaRPr lang="en-US" dirty="0"/>
           </a:p>
         </p:txBody>
       </p:sp>
@@ -1239,7 +1012,6 @@
 [Sources]
 - Project/TZ reconciliation summary and limitations: https://raw.githubusercontent.com/MuhametaliSagiden/KMGDIGITALHACKATONCS-404-406-demo/main/%D0%A1%D0%92%D0%95%D0%A0%D0%9A%D0%90-%D0%9F%D0%A0%D0%9E%D0%95%D0%9A%D0%A2%D0%9E%D0%92-%D0%A1-%D0%A2%D0%97-%D0%98-%D0%9F%D0%A0%D0%95%D0%97%D0%95%D0%9D%D0%A2%D0%90%D0%A6%D0%98%D0%95%D0%99.md</a:t>
             </a:r>
-            <a:endParaRPr lang="en-US" dirty="0"/>
           </a:p>
         </p:txBody>
       </p:sp>
@@ -1330,7 +1102,6 @@
 - Demo guide Q&amp;A: https://raw.githubusercontent.com/MuhametaliSagiden/KMGDIGITALHACKATONCS-404-406-demo/main/DEMO-%D0%96%D0%AE%D0%A0%D0%98-%D0%9D%D0%90%D0%A7%D0%9D%D0%98-%D0%97%D0%94%D0%95%D0%A1%D0%AC.md
 - Project/TZ reconciliation limitations: https://raw.githubusercontent.com/MuhametaliSagiden/KMGDIGITALHACKATONCS-404-406-demo/main/%D0%A1%D0%92%D0%95%D0%A0%D0%9A%D0%90-%D0%9F%D0%A0%D0%9E%D0%95%D0%9A%D0%A2%D0%9E%D0%92-%D0%A1-%D0%A2%D0%97-%D0%98-%D0%9F%D0%A0%D0%95%D0%97%D0%95%D0%9D%D0%A2%D0%90%D0%A6%D0%98%D0%95%D0%99.md</a:t>
             </a:r>
-            <a:endParaRPr lang="en-US" dirty="0"/>
           </a:p>
         </p:txBody>
       </p:sp>
@@ -1408,6 +1179,7 @@
         <a:solidFill>
           <a:srgbClr val="07111F"/>
         </a:solidFill>
+        <a:effectLst/>
       </p:bgPr>
     </p:bg>
     <p:spTree>
@@ -1467,7 +1239,7 @@
           </a:prstGeom>
           <a:extLst>
             <a:ext uri="{C572A759-6A51-4108-AA02-DFA0A04FC94B}">
-              <ma14:wrappingTextBoxFlag xmlns:ma14="http://schemas.microsoft.com/office/mac/drawingml/2011/main" val="0"/>
+              <ma14:wrappingTextBoxFlag xmlns:ma14="http://schemas.microsoft.com/office/mac/drawingml/2011/main" xmlns="" val="0"/>
             </a:ext>
           </a:extLst>
         </p:spPr>
@@ -1485,8 +1257,8 @@
           <a:p>
             <a:pPr algn="l"/>
             <a:fld id="{F7021451-1387-4CA6-816F-3879F97B5CBC}" type="slidenum">
-              <a:rPr b="0" lang="en-US"/>
-              <a:t>1002</a:t>
+              <a:rPr lang="en-US" b="0"/>
+              <a:t>‹#›</a:t>
             </a:fld>
             <a:endParaRPr lang="en-US"/>
           </a:p>
@@ -1503,6 +1275,11 @@
 <file path=ppt/slideMasters/slideMaster1.xml><?xml version="1.0" encoding="utf-8"?>
 <p:sldMaster xmlns:a="http://schemas.openxmlformats.org/drawingml/2006/main" xmlns:r="http://schemas.openxmlformats.org/officeDocument/2006/relationships" xmlns:p="http://schemas.openxmlformats.org/presentationml/2006/main">
   <p:cSld>
+    <p:bg>
+      <p:bgRef idx="1001">
+        <a:schemeClr val="bg1"/>
+      </p:bgRef>
+    </p:bg>
     <p:spTree>
       <p:nvGrpSpPr>
         <p:cNvPr id="1" name=""/>
@@ -1537,7 +1314,7 @@
           </a:prstGeom>
           <a:extLst>
             <a:ext uri="{C572A759-6A51-4108-AA02-DFA0A04FC94B}">
-              <ma14:wrappingTextBoxFlag xmlns:ma14="http://schemas.microsoft.com/office/mac/drawingml/2011/main" val="0"/>
+              <ma14:wrappingTextBoxFlag xmlns:ma14="http://schemas.microsoft.com/office/mac/drawingml/2011/main" xmlns="" val="0"/>
             </a:ext>
           </a:extLst>
         </p:spPr>
@@ -1555,8 +1332,8 @@
           <a:p>
             <a:pPr algn="l"/>
             <a:fld id="{F7021451-1387-4CA6-816F-3879F97B5CBC}" type="slidenum">
-              <a:rPr b="0" lang="en-US"/>
-              <a:t>null</a:t>
+              <a:rPr lang="en-US" b="0"/>
+              <a:t>‹#›</a:t>
             </a:fld>
             <a:endParaRPr lang="en-US"/>
           </a:p>
@@ -1831,6 +1608,7 @@
         <a:solidFill>
           <a:srgbClr val="07111F"/>
         </a:solidFill>
+        <a:effectLst/>
       </p:bgPr>
     </p:bg>
     <p:spTree>
@@ -1901,7 +1679,7 @@
           </a:bodyPr>
           <a:lstStyle/>
           <a:p>
-            <a:pPr algn="ctr" indent="0" marL="0">
+            <a:pPr marL="0" indent="0" algn="ctr">
               <a:buNone/>
             </a:pPr>
             <a:r>
@@ -1942,7 +1720,7 @@
           </a:bodyPr>
           <a:lstStyle/>
           <a:p>
-            <a:pPr indent="0" marL="0">
+            <a:pPr marL="0" indent="0">
               <a:buNone/>
             </a:pPr>
             <a:r>
@@ -1959,7 +1737,7 @@
             <a:endParaRPr lang="en-US" sz="4200" dirty="0"/>
           </a:p>
           <a:p>
-            <a:pPr indent="0" marL="0">
+            <a:pPr marL="0" indent="0">
               <a:buNone/>
             </a:pPr>
             <a:r>
@@ -2000,7 +1778,7 @@
           </a:bodyPr>
           <a:lstStyle/>
           <a:p>
-            <a:pPr indent="0" marL="0">
+            <a:pPr marL="0" indent="0">
               <a:buNone/>
             </a:pPr>
             <a:r>
@@ -2017,7 +1795,7 @@
             <a:endParaRPr lang="en-US" sz="1700" dirty="0"/>
           </a:p>
           <a:p>
-            <a:pPr indent="0" marL="0">
+            <a:pPr marL="0" indent="0">
               <a:buNone/>
             </a:pPr>
             <a:r>
@@ -2064,7 +1842,7 @@
           </a:bodyPr>
           <a:lstStyle/>
           <a:p>
-            <a:pPr algn="l" indent="0" marL="0">
+            <a:pPr marL="0" indent="0" algn="l">
               <a:buNone/>
             </a:pPr>
             <a:r>
@@ -2081,7 +1859,7 @@
             <a:endParaRPr lang="en-US" sz="1500" dirty="0"/>
           </a:p>
           <a:p>
-            <a:pPr algn="l" indent="0" marL="0">
+            <a:pPr marL="0" indent="0" algn="l">
               <a:buNone/>
             </a:pPr>
             <a:r>
@@ -2128,7 +1906,7 @@
           </a:bodyPr>
           <a:lstStyle/>
           <a:p>
-            <a:pPr algn="l" indent="0" marL="0">
+            <a:pPr marL="0" indent="0" algn="l">
               <a:buNone/>
             </a:pPr>
             <a:r>
@@ -2145,7 +1923,7 @@
             <a:endParaRPr lang="en-US" sz="1500" dirty="0"/>
           </a:p>
           <a:p>
-            <a:pPr algn="l" indent="0" marL="0">
+            <a:pPr marL="0" indent="0" algn="l">
               <a:buNone/>
             </a:pPr>
             <a:r>
@@ -2242,7 +2020,7 @@
           </a:bodyPr>
           <a:lstStyle/>
           <a:p>
-            <a:pPr indent="0" marL="0">
+            <a:pPr marL="0" indent="0">
               <a:buNone/>
             </a:pPr>
             <a:r>
@@ -2259,7 +2037,7 @@
             <a:endParaRPr lang="en-US" sz="1650" dirty="0"/>
           </a:p>
           <a:p>
-            <a:pPr indent="0" marL="0">
+            <a:pPr marL="0" indent="0">
               <a:buNone/>
             </a:pPr>
             <a:r>
@@ -2276,7 +2054,7 @@
             <a:endParaRPr lang="en-US" sz="1650" dirty="0"/>
           </a:p>
           <a:p>
-            <a:pPr indent="0" marL="0">
+            <a:pPr marL="0" indent="0">
               <a:buNone/>
             </a:pPr>
             <a:r>
@@ -2317,7 +2095,7 @@
           </a:bodyPr>
           <a:lstStyle/>
           <a:p>
-            <a:pPr indent="0" marL="0">
+            <a:pPr marL="0" indent="0">
               <a:buNone/>
             </a:pPr>
             <a:r>
@@ -2355,7 +2133,7 @@
           </a:prstGeom>
           <a:extLst>
             <a:ext uri="{C572A759-6A51-4108-AA02-DFA0A04FC94B}">
-              <ma14:wrappingTextBoxFlag xmlns:ma14="http://schemas.microsoft.com/office/mac/drawingml/2011/main" val="0"/>
+              <ma14:wrappingTextBoxFlag xmlns:ma14="http://schemas.microsoft.com/office/mac/drawingml/2011/main" xmlns="" val="0"/>
             </a:ext>
           </a:extLst>
         </p:spPr>
@@ -2373,7 +2151,7 @@
           <a:p>
             <a:pPr algn="l"/>
             <a:fld id="{F7021451-1387-4CA6-816F-3879F97B5CBC}" type="slidenum">
-              <a:rPr b="0" lang="en-US"/>
+              <a:rPr lang="en-US" b="0"/>
               <a:t>1</a:t>
             </a:fld>
             <a:endParaRPr lang="en-US"/>
@@ -2396,6 +2174,7 @@
         <a:solidFill>
           <a:srgbClr val="07111F"/>
         </a:solidFill>
+        <a:effectLst/>
       </p:bgPr>
     </p:bg>
     <p:spTree>
@@ -2458,7 +2237,7 @@
           </a:bodyPr>
           <a:lstStyle/>
           <a:p>
-            <a:pPr indent="0" marL="0">
+            <a:pPr marL="0" indent="0">
               <a:buNone/>
             </a:pPr>
             <a:r>
@@ -2497,7 +2276,7 @@
           <a:bodyPr wrap="square" lIns="0" tIns="0" rIns="0" bIns="0" rtlCol="0" anchor="ctr"/>
           <a:lstStyle/>
           <a:p>
-            <a:pPr algn="r" indent="0" marL="0">
+            <a:pPr marL="0" indent="0" algn="r">
               <a:buNone/>
             </a:pPr>
             <a:r>
@@ -2544,7 +2323,7 @@
           </a:bodyPr>
           <a:lstStyle/>
           <a:p>
-            <a:pPr algn="l" indent="0" marL="0">
+            <a:pPr marL="0" indent="0" algn="l">
               <a:buNone/>
             </a:pPr>
             <a:r>
@@ -2561,7 +2340,7 @@
             <a:endParaRPr lang="en-US" sz="1400" dirty="0"/>
           </a:p>
           <a:p>
-            <a:pPr algn="l" indent="0" marL="0">
+            <a:pPr marL="0" indent="0" algn="l">
               <a:buNone/>
             </a:pPr>
             <a:r>
@@ -2578,7 +2357,7 @@
             <a:endParaRPr lang="en-US" sz="1400" dirty="0"/>
           </a:p>
           <a:p>
-            <a:pPr algn="l" indent="0" marL="0">
+            <a:pPr marL="0" indent="0" algn="l">
               <a:buNone/>
             </a:pPr>
             <a:r>
@@ -2595,7 +2374,7 @@
             <a:endParaRPr lang="en-US" sz="1400" dirty="0"/>
           </a:p>
           <a:p>
-            <a:pPr algn="l" indent="0" marL="0">
+            <a:pPr marL="0" indent="0" algn="l">
               <a:buNone/>
             </a:pPr>
             <a:r>
@@ -2642,7 +2421,7 @@
           </a:bodyPr>
           <a:lstStyle/>
           <a:p>
-            <a:pPr algn="l" indent="0" marL="0">
+            <a:pPr marL="0" indent="0" algn="l">
               <a:buNone/>
             </a:pPr>
             <a:r>
@@ -2659,7 +2438,7 @@
             <a:endParaRPr lang="en-US" sz="1400" dirty="0"/>
           </a:p>
           <a:p>
-            <a:pPr algn="l" indent="0" marL="0">
+            <a:pPr marL="0" indent="0" algn="l">
               <a:buNone/>
             </a:pPr>
             <a:r>
@@ -2676,7 +2455,7 @@
             <a:endParaRPr lang="en-US" sz="1400" dirty="0"/>
           </a:p>
           <a:p>
-            <a:pPr algn="l" indent="0" marL="0">
+            <a:pPr marL="0" indent="0" algn="l">
               <a:buNone/>
             </a:pPr>
             <a:r>
@@ -2693,7 +2472,7 @@
             <a:endParaRPr lang="en-US" sz="1400" dirty="0"/>
           </a:p>
           <a:p>
-            <a:pPr algn="l" indent="0" marL="0">
+            <a:pPr marL="0" indent="0" algn="l">
               <a:buNone/>
             </a:pPr>
             <a:r>
@@ -2740,7 +2519,7 @@
           </a:bodyPr>
           <a:lstStyle/>
           <a:p>
-            <a:pPr algn="ctr" indent="0" marL="0">
+            <a:pPr marL="0" indent="0" algn="ctr">
               <a:buNone/>
             </a:pPr>
             <a:r>
@@ -2757,7 +2536,7 @@
             <a:endParaRPr lang="en-US" sz="1500" dirty="0"/>
           </a:p>
           <a:p>
-            <a:pPr algn="ctr" indent="0" marL="0">
+            <a:pPr marL="0" indent="0" algn="ctr">
               <a:buNone/>
             </a:pPr>
             <a:r>
@@ -2774,7 +2553,7 @@
             <a:endParaRPr lang="en-US" sz="1500" dirty="0"/>
           </a:p>
           <a:p>
-            <a:pPr algn="ctr" indent="0" marL="0">
+            <a:pPr marL="0" indent="0" algn="ctr">
               <a:buNone/>
             </a:pPr>
             <a:r>
@@ -2791,7 +2570,7 @@
             <a:endParaRPr lang="en-US" sz="1500" dirty="0"/>
           </a:p>
           <a:p>
-            <a:pPr algn="ctr" indent="0" marL="0">
+            <a:pPr marL="0" indent="0" algn="ctr">
               <a:buNone/>
             </a:pPr>
             <a:r>
@@ -2806,47 +2585,6 @@
               <a:t>• общая платформа с единым Dashboard — следующий этап</a:t>
             </a:r>
             <a:endParaRPr lang="en-US" sz="1500" dirty="0"/>
-          </a:p>
-        </p:txBody>
-      </p:sp>
-      <p:sp>
-        <p:nvSpPr>
-          <p:cNvPr id="8" name="Text 6"/>
-          <p:cNvSpPr/>
-          <p:nvPr/>
-        </p:nvSpPr>
-        <p:spPr>
-          <a:xfrm>
-            <a:off x="1005840" y="5715000"/>
-            <a:ext cx="9875520" cy="329184"/>
-          </a:xfrm>
-          <a:prstGeom prst="rect">
-            <a:avLst/>
-          </a:prstGeom>
-          <a:noFill/>
-          <a:ln/>
-        </p:spPr>
-        <p:txBody>
-          <a:bodyPr wrap="square" lIns="0" tIns="0" rIns="0" bIns="0" rtlCol="0" anchor="ctr">
-            <a:normAutofit/>
-          </a:bodyPr>
-          <a:lstStyle/>
-          <a:p>
-            <a:pPr algn="ctr" indent="0" marL="0">
-              <a:buNone/>
-            </a:pPr>
-            <a:r>
-              <a:rPr lang="en-US" sz="1280" dirty="0">
-                <a:solidFill>
-                  <a:srgbClr val="A8B3C4"/>
-                </a:solidFill>
-                <a:latin typeface="DejaVu Sans" pitchFamily="34" charset="0"/>
-                <a:ea typeface="DejaVu Sans" pitchFamily="34" charset="-122"/>
-                <a:cs typeface="DejaVu Sans" pitchFamily="34" charset="-120"/>
-              </a:rPr>
-              <a:t>Честность про ограничения усиливает доверие: вы знаете, что сделано сейчас, а что является следующим шагом.</a:t>
-            </a:r>
-            <a:endParaRPr lang="en-US" sz="1280" dirty="0"/>
           </a:p>
         </p:txBody>
       </p:sp>
@@ -2870,7 +2608,7 @@
           </a:prstGeom>
           <a:extLst>
             <a:ext uri="{C572A759-6A51-4108-AA02-DFA0A04FC94B}">
-              <ma14:wrappingTextBoxFlag xmlns:ma14="http://schemas.microsoft.com/office/mac/drawingml/2011/main" val="0"/>
+              <ma14:wrappingTextBoxFlag xmlns:ma14="http://schemas.microsoft.com/office/mac/drawingml/2011/main" xmlns="" val="0"/>
             </a:ext>
           </a:extLst>
         </p:spPr>
@@ -2888,7 +2626,7 @@
           <a:p>
             <a:pPr algn="l"/>
             <a:fld id="{F7021451-1387-4CA6-816F-3879F97B5CBC}" type="slidenum">
-              <a:rPr b="0" lang="en-US"/>
+              <a:rPr lang="en-US" b="0"/>
               <a:t>10</a:t>
             </a:fld>
             <a:endParaRPr lang="en-US"/>
@@ -2911,6 +2649,7 @@
         <a:solidFill>
           <a:srgbClr val="07111F"/>
         </a:solidFill>
+        <a:effectLst/>
       </p:bgPr>
     </p:bg>
     <p:spTree>
@@ -2973,7 +2712,7 @@
           </a:bodyPr>
           <a:lstStyle/>
           <a:p>
-            <a:pPr indent="0" marL="0">
+            <a:pPr marL="0" indent="0">
               <a:buNone/>
             </a:pPr>
             <a:r>
@@ -3012,7 +2751,7 @@
           <a:bodyPr wrap="square" lIns="0" tIns="0" rIns="0" bIns="0" rtlCol="0" anchor="ctr"/>
           <a:lstStyle/>
           <a:p>
-            <a:pPr algn="r" indent="0" marL="0">
+            <a:pPr marL="0" indent="0" algn="r">
               <a:buNone/>
             </a:pPr>
             <a:r>
@@ -3053,7 +2792,7 @@
           </a:bodyPr>
           <a:lstStyle/>
           <a:p>
-            <a:pPr algn="l" indent="0" marL="0">
+            <a:pPr marL="0" indent="0" algn="l">
               <a:buNone/>
             </a:pPr>
             <a:r>
@@ -3070,7 +2809,7 @@
             <a:endParaRPr lang="en-US" sz="3000" dirty="0"/>
           </a:p>
           <a:p>
-            <a:pPr algn="l" indent="0" marL="0">
+            <a:pPr marL="0" indent="0" algn="l">
               <a:buNone/>
             </a:pPr>
             <a:r>
@@ -3111,7 +2850,7 @@
           </a:bodyPr>
           <a:lstStyle/>
           <a:p>
-            <a:pPr indent="0" marL="0">
+            <a:pPr marL="0" indent="0">
               <a:buNone/>
             </a:pPr>
             <a:r>
@@ -3158,7 +2897,7 @@
           </a:bodyPr>
           <a:lstStyle/>
           <a:p>
-            <a:pPr algn="l" indent="0" marL="0">
+            <a:pPr marL="0" indent="0" algn="l">
               <a:buNone/>
             </a:pPr>
             <a:r>
@@ -3175,7 +2914,7 @@
             <a:endParaRPr lang="en-US" sz="1550" dirty="0"/>
           </a:p>
           <a:p>
-            <a:pPr algn="l" indent="0" marL="0">
+            <a:pPr marL="0" indent="0" algn="l">
               <a:buNone/>
             </a:pPr>
             <a:r>
@@ -3222,7 +2961,7 @@
           </a:bodyPr>
           <a:lstStyle/>
           <a:p>
-            <a:pPr algn="l" indent="0" marL="0">
+            <a:pPr marL="0" indent="0" algn="l">
               <a:buNone/>
             </a:pPr>
             <a:r>
@@ -3239,7 +2978,7 @@
             <a:endParaRPr lang="en-US" sz="1550" dirty="0"/>
           </a:p>
           <a:p>
-            <a:pPr algn="l" indent="0" marL="0">
+            <a:pPr marL="0" indent="0" algn="l">
               <a:buNone/>
             </a:pPr>
             <a:r>
@@ -3286,7 +3025,7 @@
           </a:bodyPr>
           <a:lstStyle/>
           <a:p>
-            <a:pPr algn="ctr" indent="0" marL="0">
+            <a:pPr marL="0" indent="0" algn="ctr">
               <a:buNone/>
             </a:pPr>
             <a:r>
@@ -3358,7 +3097,7 @@
           </a:bodyPr>
           <a:lstStyle/>
           <a:p>
-            <a:pPr algn="ctr" indent="0" marL="0">
+            <a:pPr marL="0" indent="0" algn="ctr">
               <a:buNone/>
             </a:pPr>
             <a:r>
@@ -3405,7 +3144,7 @@
           </a:bodyPr>
           <a:lstStyle/>
           <a:p>
-            <a:pPr algn="ctr" indent="0" marL="0">
+            <a:pPr marL="0" indent="0" algn="ctr">
               <a:buNone/>
             </a:pPr>
             <a:r>
@@ -3477,7 +3216,7 @@
           </a:bodyPr>
           <a:lstStyle/>
           <a:p>
-            <a:pPr algn="ctr" indent="0" marL="0">
+            <a:pPr marL="0" indent="0" algn="ctr">
               <a:buNone/>
             </a:pPr>
             <a:r>
@@ -3518,7 +3257,7 @@
           </a:bodyPr>
           <a:lstStyle/>
           <a:p>
-            <a:pPr indent="0" marL="0">
+            <a:pPr marL="0" indent="0">
               <a:buNone/>
             </a:pPr>
             <a:r>
@@ -3556,7 +3295,7 @@
           </a:prstGeom>
           <a:extLst>
             <a:ext uri="{C572A759-6A51-4108-AA02-DFA0A04FC94B}">
-              <ma14:wrappingTextBoxFlag xmlns:ma14="http://schemas.microsoft.com/office/mac/drawingml/2011/main" val="0"/>
+              <ma14:wrappingTextBoxFlag xmlns:ma14="http://schemas.microsoft.com/office/mac/drawingml/2011/main" xmlns="" val="0"/>
             </a:ext>
           </a:extLst>
         </p:spPr>
@@ -3574,7 +3313,7 @@
           <a:p>
             <a:pPr algn="l"/>
             <a:fld id="{F7021451-1387-4CA6-816F-3879F97B5CBC}" type="slidenum">
-              <a:rPr b="0" lang="en-US"/>
+              <a:rPr lang="en-US" b="0"/>
               <a:t>2</a:t>
             </a:fld>
             <a:endParaRPr lang="en-US"/>
@@ -3597,6 +3336,7 @@
         <a:solidFill>
           <a:srgbClr val="07111F"/>
         </a:solidFill>
+        <a:effectLst/>
       </p:bgPr>
     </p:bg>
     <p:spTree>
@@ -3659,7 +3399,7 @@
           </a:bodyPr>
           <a:lstStyle/>
           <a:p>
-            <a:pPr indent="0" marL="0">
+            <a:pPr marL="0" indent="0">
               <a:buNone/>
             </a:pPr>
             <a:r>
@@ -3698,7 +3438,7 @@
           <a:bodyPr wrap="square" lIns="0" tIns="0" rIns="0" bIns="0" rtlCol="0" anchor="ctr"/>
           <a:lstStyle/>
           <a:p>
-            <a:pPr algn="r" indent="0" marL="0">
+            <a:pPr marL="0" indent="0" algn="r">
               <a:buNone/>
             </a:pPr>
             <a:r>
@@ -3739,7 +3479,7 @@
           </a:bodyPr>
           <a:lstStyle/>
           <a:p>
-            <a:pPr algn="l" indent="0" marL="0">
+            <a:pPr marL="0" indent="0" algn="l">
               <a:buNone/>
             </a:pPr>
             <a:r>
@@ -3756,7 +3496,7 @@
             <a:endParaRPr lang="en-US" sz="2700" dirty="0"/>
           </a:p>
           <a:p>
-            <a:pPr algn="l" indent="0" marL="0">
+            <a:pPr marL="0" indent="0" algn="l">
               <a:buNone/>
             </a:pPr>
             <a:r>
@@ -3803,7 +3543,7 @@
           </a:bodyPr>
           <a:lstStyle/>
           <a:p>
-            <a:pPr algn="ctr" indent="0" marL="0">
+            <a:pPr marL="0" indent="0" algn="ctr">
               <a:buNone/>
             </a:pPr>
             <a:r>
@@ -3820,7 +3560,7 @@
             <a:endParaRPr lang="en-US" sz="1250" dirty="0"/>
           </a:p>
           <a:p>
-            <a:pPr algn="ctr" indent="0" marL="0">
+            <a:pPr marL="0" indent="0" algn="ctr">
               <a:buNone/>
             </a:pPr>
             <a:r>
@@ -3837,7 +3577,7 @@
             <a:endParaRPr lang="en-US" sz="1250" dirty="0"/>
           </a:p>
           <a:p>
-            <a:pPr algn="ctr" indent="0" marL="0">
+            <a:pPr marL="0" indent="0" algn="ctr">
               <a:buNone/>
             </a:pPr>
             <a:r>
@@ -3909,7 +3649,7 @@
           </a:bodyPr>
           <a:lstStyle/>
           <a:p>
-            <a:pPr algn="ctr" indent="0" marL="0">
+            <a:pPr marL="0" indent="0" algn="ctr">
               <a:buNone/>
             </a:pPr>
             <a:r>
@@ -3926,7 +3666,7 @@
             <a:endParaRPr lang="en-US" sz="1300" dirty="0"/>
           </a:p>
           <a:p>
-            <a:pPr algn="ctr" indent="0" marL="0">
+            <a:pPr marL="0" indent="0" algn="ctr">
               <a:buNone/>
             </a:pPr>
             <a:r>
@@ -3998,7 +3738,7 @@
           </a:bodyPr>
           <a:lstStyle/>
           <a:p>
-            <a:pPr algn="ctr" indent="0" marL="0">
+            <a:pPr marL="0" indent="0" algn="ctr">
               <a:buNone/>
             </a:pPr>
             <a:r>
@@ -4015,7 +3755,7 @@
             <a:endParaRPr lang="en-US" sz="1250" dirty="0"/>
           </a:p>
           <a:p>
-            <a:pPr algn="ctr" indent="0" marL="0">
+            <a:pPr marL="0" indent="0" algn="ctr">
               <a:buNone/>
             </a:pPr>
             <a:r>
@@ -4087,7 +3827,7 @@
           </a:bodyPr>
           <a:lstStyle/>
           <a:p>
-            <a:pPr algn="ctr" indent="0" marL="0">
+            <a:pPr marL="0" indent="0" algn="ctr">
               <a:buNone/>
             </a:pPr>
             <a:r>
@@ -4104,7 +3844,7 @@
             <a:endParaRPr lang="en-US" sz="1250" dirty="0"/>
           </a:p>
           <a:p>
-            <a:pPr algn="ctr" indent="0" marL="0">
+            <a:pPr marL="0" indent="0" algn="ctr">
               <a:buNone/>
             </a:pPr>
             <a:r>
@@ -4176,7 +3916,7 @@
           </a:bodyPr>
           <a:lstStyle/>
           <a:p>
-            <a:pPr algn="ctr" indent="0" marL="0">
+            <a:pPr marL="0" indent="0" algn="ctr">
               <a:buNone/>
             </a:pPr>
             <a:r>
@@ -4193,7 +3933,7 @@
             <a:endParaRPr lang="en-US" sz="1250" dirty="0"/>
           </a:p>
           <a:p>
-            <a:pPr algn="ctr" indent="0" marL="0">
+            <a:pPr marL="0" indent="0" algn="ctr">
               <a:buNone/>
             </a:pPr>
             <a:r>
@@ -4232,7 +3972,7 @@
           <a:bodyPr wrap="square" lIns="0" tIns="0" rIns="0" bIns="0" rtlCol="0" anchor="ctr"/>
           <a:lstStyle/>
           <a:p>
-            <a:pPr indent="0" marL="0">
+            <a:pPr marL="0" indent="0">
               <a:buNone/>
             </a:pPr>
             <a:r>
@@ -4273,7 +4013,7 @@
           </a:bodyPr>
           <a:lstStyle/>
           <a:p>
-            <a:pPr indent="0" marL="0">
+            <a:pPr marL="0" indent="0">
               <a:buNone/>
             </a:pPr>
             <a:r>
@@ -4288,47 +4028,6 @@
               <a:t>lab_nested_admin → DemoHelpDesk → DemoITAdmins → Domain Admins</a:t>
             </a:r>
             <a:endParaRPr lang="en-US" sz="1700" dirty="0"/>
-          </a:p>
-        </p:txBody>
-      </p:sp>
-      <p:sp>
-        <p:nvSpPr>
-          <p:cNvPr id="17" name="Text 15"/>
-          <p:cNvSpPr/>
-          <p:nvPr/>
-        </p:nvSpPr>
-        <p:spPr>
-          <a:xfrm>
-            <a:off x="594360" y="5413248"/>
-            <a:ext cx="6858000" cy="365760"/>
-          </a:xfrm>
-          <a:prstGeom prst="rect">
-            <a:avLst/>
-          </a:prstGeom>
-          <a:noFill/>
-          <a:ln/>
-        </p:spPr>
-        <p:txBody>
-          <a:bodyPr wrap="square" lIns="0" tIns="0" rIns="0" bIns="0" rtlCol="0" anchor="ctr">
-            <a:normAutofit/>
-          </a:bodyPr>
-          <a:lstStyle/>
-          <a:p>
-            <a:pPr indent="0" marL="0">
-              <a:buNone/>
-            </a:pPr>
-            <a:r>
-              <a:rPr lang="en-US" sz="1400" dirty="0">
-                <a:solidFill>
-                  <a:srgbClr val="A8B3C4"/>
-                </a:solidFill>
-                <a:latin typeface="DejaVu Sans" pitchFamily="34" charset="0"/>
-                <a:ea typeface="DejaVu Sans" pitchFamily="34" charset="-122"/>
-                <a:cs typeface="DejaVu Sans" pitchFamily="34" charset="-120"/>
-              </a:rPr>
-              <a:t>Показываем не просто “есть админ‑права”, а откуда они пришли.</a:t>
-            </a:r>
-            <a:endParaRPr lang="en-US" sz="1400" dirty="0"/>
           </a:p>
         </p:txBody>
       </p:sp>
@@ -4363,7 +4062,7 @@
           </a:bodyPr>
           <a:lstStyle/>
           <a:p>
-            <a:pPr algn="ctr" indent="0" marL="0">
+            <a:pPr marL="0" indent="0" algn="ctr">
               <a:buNone/>
             </a:pPr>
             <a:r>
@@ -4412,7 +4111,7 @@
           </a:bodyPr>
           <a:lstStyle/>
           <a:p>
-            <a:pPr algn="ctr" indent="0" marL="0">
+            <a:pPr marL="0" indent="0" algn="ctr">
               <a:buNone/>
             </a:pPr>
             <a:r>
@@ -4461,7 +4160,7 @@
           </a:bodyPr>
           <a:lstStyle/>
           <a:p>
-            <a:pPr algn="ctr" indent="0" marL="0">
+            <a:pPr marL="0" indent="0" algn="ctr">
               <a:buNone/>
             </a:pPr>
             <a:r>
@@ -4499,7 +4198,7 @@
           </a:prstGeom>
           <a:extLst>
             <a:ext uri="{C572A759-6A51-4108-AA02-DFA0A04FC94B}">
-              <ma14:wrappingTextBoxFlag xmlns:ma14="http://schemas.microsoft.com/office/mac/drawingml/2011/main" val="0"/>
+              <ma14:wrappingTextBoxFlag xmlns:ma14="http://schemas.microsoft.com/office/mac/drawingml/2011/main" xmlns="" val="0"/>
             </a:ext>
           </a:extLst>
         </p:spPr>
@@ -4517,7 +4216,7 @@
           <a:p>
             <a:pPr algn="l"/>
             <a:fld id="{F7021451-1387-4CA6-816F-3879F97B5CBC}" type="slidenum">
-              <a:rPr b="0" lang="en-US"/>
+              <a:rPr lang="en-US" b="0"/>
               <a:t>3</a:t>
             </a:fld>
             <a:endParaRPr lang="en-US"/>
@@ -4540,6 +4239,7 @@
         <a:solidFill>
           <a:srgbClr val="07111F"/>
         </a:solidFill>
+        <a:effectLst/>
       </p:bgPr>
     </p:bg>
     <p:spTree>
@@ -4602,7 +4302,7 @@
           </a:bodyPr>
           <a:lstStyle/>
           <a:p>
-            <a:pPr indent="0" marL="0">
+            <a:pPr marL="0" indent="0">
               <a:buNone/>
             </a:pPr>
             <a:r>
@@ -4641,7 +4341,7 @@
           <a:bodyPr wrap="square" lIns="0" tIns="0" rIns="0" bIns="0" rtlCol="0" anchor="ctr"/>
           <a:lstStyle/>
           <a:p>
-            <a:pPr algn="r" indent="0" marL="0">
+            <a:pPr marL="0" indent="0" algn="r">
               <a:buNone/>
             </a:pPr>
             <a:r>
@@ -4682,7 +4382,7 @@
           </a:bodyPr>
           <a:lstStyle/>
           <a:p>
-            <a:pPr algn="l" indent="0" marL="0">
+            <a:pPr marL="0" indent="0" algn="l">
               <a:buNone/>
             </a:pPr>
             <a:r>
@@ -4731,7 +4431,7 @@
           </a:bodyPr>
           <a:lstStyle/>
           <a:p>
-            <a:pPr algn="ctr" indent="0" marL="0">
+            <a:pPr marL="0" indent="0" algn="ctr">
               <a:buNone/>
             </a:pPr>
             <a:r>
@@ -4772,7 +4472,7 @@
           </a:bodyPr>
           <a:lstStyle/>
           <a:p>
-            <a:pPr indent="0" marL="0">
+            <a:pPr marL="0" indent="0">
               <a:buNone/>
             </a:pPr>
             <a:r>
@@ -4813,7 +4513,7 @@
           </a:bodyPr>
           <a:lstStyle/>
           <a:p>
-            <a:pPr indent="0" marL="0">
+            <a:pPr marL="0" indent="0">
               <a:buNone/>
             </a:pPr>
             <a:r>
@@ -4862,7 +4562,7 @@
           </a:bodyPr>
           <a:lstStyle/>
           <a:p>
-            <a:pPr algn="ctr" indent="0" marL="0">
+            <a:pPr marL="0" indent="0" algn="ctr">
               <a:buNone/>
             </a:pPr>
             <a:r>
@@ -4903,7 +4603,7 @@
           </a:bodyPr>
           <a:lstStyle/>
           <a:p>
-            <a:pPr indent="0" marL="0">
+            <a:pPr marL="0" indent="0">
               <a:buNone/>
             </a:pPr>
             <a:r>
@@ -4944,7 +4644,7 @@
           </a:bodyPr>
           <a:lstStyle/>
           <a:p>
-            <a:pPr indent="0" marL="0">
+            <a:pPr marL="0" indent="0">
               <a:buNone/>
             </a:pPr>
             <a:r>
@@ -4993,7 +4693,7 @@
           </a:bodyPr>
           <a:lstStyle/>
           <a:p>
-            <a:pPr algn="ctr" indent="0" marL="0">
+            <a:pPr marL="0" indent="0" algn="ctr">
               <a:buNone/>
             </a:pPr>
             <a:r>
@@ -5034,7 +4734,7 @@
           </a:bodyPr>
           <a:lstStyle/>
           <a:p>
-            <a:pPr indent="0" marL="0">
+            <a:pPr marL="0" indent="0">
               <a:buNone/>
             </a:pPr>
             <a:r>
@@ -5075,7 +4775,7 @@
           </a:bodyPr>
           <a:lstStyle/>
           <a:p>
-            <a:pPr indent="0" marL="0">
+            <a:pPr marL="0" indent="0">
               <a:buNone/>
             </a:pPr>
             <a:r>
@@ -5124,7 +4824,7 @@
           </a:bodyPr>
           <a:lstStyle/>
           <a:p>
-            <a:pPr algn="ctr" indent="0" marL="0">
+            <a:pPr marL="0" indent="0" algn="ctr">
               <a:buNone/>
             </a:pPr>
             <a:r>
@@ -5165,7 +4865,7 @@
           </a:bodyPr>
           <a:lstStyle/>
           <a:p>
-            <a:pPr indent="0" marL="0">
+            <a:pPr marL="0" indent="0">
               <a:buNone/>
             </a:pPr>
             <a:r>
@@ -5206,7 +4906,7 @@
           </a:bodyPr>
           <a:lstStyle/>
           <a:p>
-            <a:pPr indent="0" marL="0">
+            <a:pPr marL="0" indent="0">
               <a:buNone/>
             </a:pPr>
             <a:r>
@@ -5255,7 +4955,7 @@
           </a:bodyPr>
           <a:lstStyle/>
           <a:p>
-            <a:pPr algn="ctr" indent="0" marL="0">
+            <a:pPr marL="0" indent="0" algn="ctr">
               <a:buNone/>
             </a:pPr>
             <a:r>
@@ -5296,7 +4996,7 @@
           </a:bodyPr>
           <a:lstStyle/>
           <a:p>
-            <a:pPr indent="0" marL="0">
+            <a:pPr marL="0" indent="0">
               <a:buNone/>
             </a:pPr>
             <a:r>
@@ -5337,7 +5037,7 @@
           </a:bodyPr>
           <a:lstStyle/>
           <a:p>
-            <a:pPr indent="0" marL="0">
+            <a:pPr marL="0" indent="0">
               <a:buNone/>
             </a:pPr>
             <a:r>
@@ -5384,7 +5084,7 @@
           </a:bodyPr>
           <a:lstStyle/>
           <a:p>
-            <a:pPr algn="l" indent="0" marL="0">
+            <a:pPr marL="0" indent="0" algn="l">
               <a:buNone/>
             </a:pPr>
             <a:r>
@@ -5401,7 +5101,7 @@
             <a:endParaRPr lang="en-US" sz="1320" dirty="0"/>
           </a:p>
           <a:p>
-            <a:pPr algn="l" indent="0" marL="0">
+            <a:pPr marL="0" indent="0" algn="l">
               <a:buNone/>
             </a:pPr>
             <a:r>
@@ -5448,7 +5148,7 @@
           </a:bodyPr>
           <a:lstStyle/>
           <a:p>
-            <a:pPr algn="l" indent="0" marL="0">
+            <a:pPr marL="0" indent="0" algn="l">
               <a:buNone/>
             </a:pPr>
             <a:r>
@@ -5465,7 +5165,7 @@
             <a:endParaRPr lang="en-US" sz="1280" dirty="0"/>
           </a:p>
           <a:p>
-            <a:pPr algn="l" indent="0" marL="0">
+            <a:pPr marL="0" indent="0" algn="l">
               <a:buNone/>
             </a:pPr>
             <a:r>
@@ -5482,7 +5182,7 @@
             <a:endParaRPr lang="en-US" sz="1280" dirty="0"/>
           </a:p>
           <a:p>
-            <a:pPr algn="l" indent="0" marL="0">
+            <a:pPr marL="0" indent="0" algn="l">
               <a:buNone/>
             </a:pPr>
             <a:r>
@@ -5499,7 +5199,7 @@
             <a:endParaRPr lang="en-US" sz="1280" dirty="0"/>
           </a:p>
           <a:p>
-            <a:pPr algn="l" indent="0" marL="0">
+            <a:pPr marL="0" indent="0" algn="l">
               <a:buNone/>
             </a:pPr>
             <a:r>
@@ -5516,7 +5216,7 @@
             <a:endParaRPr lang="en-US" sz="1280" dirty="0"/>
           </a:p>
           <a:p>
-            <a:pPr algn="l" indent="0" marL="0">
+            <a:pPr marL="0" indent="0" algn="l">
               <a:buNone/>
             </a:pPr>
             <a:r>
@@ -5531,47 +5231,6 @@
               <a:t>→ Domain Admins</a:t>
             </a:r>
             <a:endParaRPr lang="en-US" sz="1280" dirty="0"/>
-          </a:p>
-        </p:txBody>
-      </p:sp>
-      <p:sp>
-        <p:nvSpPr>
-          <p:cNvPr id="23" name="Text 21"/>
-          <p:cNvSpPr/>
-          <p:nvPr/>
-        </p:nvSpPr>
-        <p:spPr>
-          <a:xfrm>
-            <a:off x="594360" y="5989320"/>
-            <a:ext cx="8778240" cy="310896"/>
-          </a:xfrm>
-          <a:prstGeom prst="rect">
-            <a:avLst/>
-          </a:prstGeom>
-          <a:noFill/>
-          <a:ln/>
-        </p:spPr>
-        <p:txBody>
-          <a:bodyPr wrap="square" lIns="0" tIns="0" rIns="0" bIns="0" rtlCol="0" anchor="ctr">
-            <a:normAutofit/>
-          </a:bodyPr>
-          <a:lstStyle/>
-          <a:p>
-            <a:pPr indent="0" marL="0">
-              <a:buNone/>
-            </a:pPr>
-            <a:r>
-              <a:rPr lang="en-US" sz="1150" dirty="0">
-                <a:solidFill>
-                  <a:srgbClr val="A8B3C4"/>
-                </a:solidFill>
-                <a:latin typeface="DejaVu Sans" pitchFamily="34" charset="0"/>
-                <a:ea typeface="DejaVu Sans" pitchFamily="34" charset="-122"/>
-                <a:cs typeface="DejaVu Sans" pitchFamily="34" charset="-120"/>
-              </a:rPr>
-              <a:t>Не тратьте время на установку. Показывайте готовую VM и заранее открытые вкладки.</a:t>
-            </a:r>
-            <a:endParaRPr lang="en-US" sz="1150" dirty="0"/>
           </a:p>
         </p:txBody>
       </p:sp>
@@ -5595,7 +5254,7 @@
           </a:prstGeom>
           <a:extLst>
             <a:ext uri="{C572A759-6A51-4108-AA02-DFA0A04FC94B}">
-              <ma14:wrappingTextBoxFlag xmlns:ma14="http://schemas.microsoft.com/office/mac/drawingml/2011/main" val="0"/>
+              <ma14:wrappingTextBoxFlag xmlns:ma14="http://schemas.microsoft.com/office/mac/drawingml/2011/main" xmlns="" val="0"/>
             </a:ext>
           </a:extLst>
         </p:spPr>
@@ -5613,7 +5272,7 @@
           <a:p>
             <a:pPr algn="l"/>
             <a:fld id="{F7021451-1387-4CA6-816F-3879F97B5CBC}" type="slidenum">
-              <a:rPr b="0" lang="en-US"/>
+              <a:rPr lang="en-US" b="0"/>
               <a:t>4</a:t>
             </a:fld>
             <a:endParaRPr lang="en-US"/>
@@ -5636,6 +5295,7 @@
         <a:solidFill>
           <a:srgbClr val="07111F"/>
         </a:solidFill>
+        <a:effectLst/>
       </p:bgPr>
     </p:bg>
     <p:spTree>
@@ -5698,7 +5358,7 @@
           </a:bodyPr>
           <a:lstStyle/>
           <a:p>
-            <a:pPr indent="0" marL="0">
+            <a:pPr marL="0" indent="0">
               <a:buNone/>
             </a:pPr>
             <a:r>
@@ -5737,7 +5397,7 @@
           <a:bodyPr wrap="square" lIns="0" tIns="0" rIns="0" bIns="0" rtlCol="0" anchor="ctr"/>
           <a:lstStyle/>
           <a:p>
-            <a:pPr algn="r" indent="0" marL="0">
+            <a:pPr marL="0" indent="0" algn="r">
               <a:buNone/>
             </a:pPr>
             <a:r>
@@ -5778,7 +5438,7 @@
           </a:bodyPr>
           <a:lstStyle/>
           <a:p>
-            <a:pPr algn="l" indent="0" marL="0">
+            <a:pPr marL="0" indent="0" algn="l">
               <a:buNone/>
             </a:pPr>
             <a:r>
@@ -5795,7 +5455,7 @@
             <a:endParaRPr lang="en-US" sz="2700" dirty="0"/>
           </a:p>
           <a:p>
-            <a:pPr algn="l" indent="0" marL="0">
+            <a:pPr marL="0" indent="0" algn="l">
               <a:buNone/>
             </a:pPr>
             <a:r>
@@ -5842,7 +5502,7 @@
           </a:bodyPr>
           <a:lstStyle/>
           <a:p>
-            <a:pPr algn="ctr" indent="0" marL="0">
+            <a:pPr marL="0" indent="0" algn="ctr">
               <a:buNone/>
             </a:pPr>
             <a:r>
@@ -5859,7 +5519,7 @@
             <a:endParaRPr lang="en-US" sz="1250" dirty="0"/>
           </a:p>
           <a:p>
-            <a:pPr algn="ctr" indent="0" marL="0">
+            <a:pPr marL="0" indent="0" algn="ctr">
               <a:buNone/>
             </a:pPr>
             <a:r>
@@ -5876,7 +5536,7 @@
             <a:endParaRPr lang="en-US" sz="1250" dirty="0"/>
           </a:p>
           <a:p>
-            <a:pPr algn="ctr" indent="0" marL="0">
+            <a:pPr marL="0" indent="0" algn="ctr">
               <a:buNone/>
             </a:pPr>
             <a:r>
@@ -5948,7 +5608,7 @@
           </a:bodyPr>
           <a:lstStyle/>
           <a:p>
-            <a:pPr algn="ctr" indent="0" marL="0">
+            <a:pPr marL="0" indent="0" algn="ctr">
               <a:buNone/>
             </a:pPr>
             <a:r>
@@ -5965,7 +5625,7 @@
             <a:endParaRPr lang="en-US" sz="1250" dirty="0"/>
           </a:p>
           <a:p>
-            <a:pPr algn="ctr" indent="0" marL="0">
+            <a:pPr marL="0" indent="0" algn="ctr">
               <a:buNone/>
             </a:pPr>
             <a:r>
@@ -6037,7 +5697,7 @@
           </a:bodyPr>
           <a:lstStyle/>
           <a:p>
-            <a:pPr algn="ctr" indent="0" marL="0">
+            <a:pPr marL="0" indent="0" algn="ctr">
               <a:buNone/>
             </a:pPr>
             <a:r>
@@ -6054,7 +5714,7 @@
             <a:endParaRPr lang="en-US" sz="1220" dirty="0"/>
           </a:p>
           <a:p>
-            <a:pPr algn="ctr" indent="0" marL="0">
+            <a:pPr marL="0" indent="0" algn="ctr">
               <a:buNone/>
             </a:pPr>
             <a:r>
@@ -6071,7 +5731,7 @@
             <a:endParaRPr lang="en-US" sz="1220" dirty="0"/>
           </a:p>
           <a:p>
-            <a:pPr algn="ctr" indent="0" marL="0">
+            <a:pPr marL="0" indent="0" algn="ctr">
               <a:buNone/>
             </a:pPr>
             <a:r>
@@ -6088,7 +5748,7 @@
             <a:endParaRPr lang="en-US" sz="1220" dirty="0"/>
           </a:p>
           <a:p>
-            <a:pPr algn="ctr" indent="0" marL="0">
+            <a:pPr marL="0" indent="0" algn="ctr">
               <a:buNone/>
             </a:pPr>
             <a:r>
@@ -6160,7 +5820,7 @@
           </a:bodyPr>
           <a:lstStyle/>
           <a:p>
-            <a:pPr algn="ctr" indent="0" marL="0">
+            <a:pPr marL="0" indent="0" algn="ctr">
               <a:buNone/>
             </a:pPr>
             <a:r>
@@ -6177,7 +5837,7 @@
             <a:endParaRPr lang="en-US" sz="1300" dirty="0"/>
           </a:p>
           <a:p>
-            <a:pPr algn="ctr" indent="0" marL="0">
+            <a:pPr marL="0" indent="0" algn="ctr">
               <a:buNone/>
             </a:pPr>
             <a:r>
@@ -6249,7 +5909,7 @@
           </a:bodyPr>
           <a:lstStyle/>
           <a:p>
-            <a:pPr algn="ctr" indent="0" marL="0">
+            <a:pPr marL="0" indent="0" algn="ctr">
               <a:buNone/>
             </a:pPr>
             <a:r>
@@ -6266,7 +5926,7 @@
             <a:endParaRPr lang="en-US" sz="1220" dirty="0"/>
           </a:p>
           <a:p>
-            <a:pPr algn="ctr" indent="0" marL="0">
+            <a:pPr marL="0" indent="0" algn="ctr">
               <a:buNone/>
             </a:pPr>
             <a:r>
@@ -6283,7 +5943,7 @@
             <a:endParaRPr lang="en-US" sz="1220" dirty="0"/>
           </a:p>
           <a:p>
-            <a:pPr algn="ctr" indent="0" marL="0">
+            <a:pPr marL="0" indent="0" algn="ctr">
               <a:buNone/>
             </a:pPr>
             <a:r>
@@ -6330,7 +5990,7 @@
           </a:bodyPr>
           <a:lstStyle/>
           <a:p>
-            <a:pPr algn="l" indent="0" marL="0">
+            <a:pPr marL="0" indent="0" algn="l">
               <a:buNone/>
             </a:pPr>
             <a:r>
@@ -6377,7 +6037,7 @@
           </a:bodyPr>
           <a:lstStyle/>
           <a:p>
-            <a:pPr algn="l" indent="0" marL="0">
+            <a:pPr marL="0" indent="0" algn="l">
               <a:buNone/>
             </a:pPr>
             <a:r>
@@ -6394,7 +6054,7 @@
             <a:endParaRPr lang="en-US" sz="1360" dirty="0"/>
           </a:p>
           <a:p>
-            <a:pPr algn="l" indent="0" marL="0">
+            <a:pPr marL="0" indent="0" algn="l">
               <a:buNone/>
             </a:pPr>
             <a:r>
@@ -6432,7 +6092,7 @@
           </a:prstGeom>
           <a:extLst>
             <a:ext uri="{C572A759-6A51-4108-AA02-DFA0A04FC94B}">
-              <ma14:wrappingTextBoxFlag xmlns:ma14="http://schemas.microsoft.com/office/mac/drawingml/2011/main" val="0"/>
+              <ma14:wrappingTextBoxFlag xmlns:ma14="http://schemas.microsoft.com/office/mac/drawingml/2011/main" xmlns="" val="0"/>
             </a:ext>
           </a:extLst>
         </p:spPr>
@@ -6450,7 +6110,7 @@
           <a:p>
             <a:pPr algn="l"/>
             <a:fld id="{F7021451-1387-4CA6-816F-3879F97B5CBC}" type="slidenum">
-              <a:rPr b="0" lang="en-US"/>
+              <a:rPr lang="en-US" b="0"/>
               <a:t>5</a:t>
             </a:fld>
             <a:endParaRPr lang="en-US"/>
@@ -6473,6 +6133,7 @@
         <a:solidFill>
           <a:srgbClr val="07111F"/>
         </a:solidFill>
+        <a:effectLst/>
       </p:bgPr>
     </p:bg>
     <p:spTree>
@@ -6535,7 +6196,7 @@
           </a:bodyPr>
           <a:lstStyle/>
           <a:p>
-            <a:pPr indent="0" marL="0">
+            <a:pPr marL="0" indent="0">
               <a:buNone/>
             </a:pPr>
             <a:r>
@@ -6574,7 +6235,7 @@
           <a:bodyPr wrap="square" lIns="0" tIns="0" rIns="0" bIns="0" rtlCol="0" anchor="ctr"/>
           <a:lstStyle/>
           <a:p>
-            <a:pPr algn="r" indent="0" marL="0">
+            <a:pPr marL="0" indent="0" algn="r">
               <a:buNone/>
             </a:pPr>
             <a:r>
@@ -6615,7 +6276,7 @@
           </a:bodyPr>
           <a:lstStyle/>
           <a:p>
-            <a:pPr algn="l" indent="0" marL="0">
+            <a:pPr marL="0" indent="0" algn="l">
               <a:buNone/>
             </a:pPr>
             <a:r>
@@ -6664,7 +6325,7 @@
           </a:bodyPr>
           <a:lstStyle/>
           <a:p>
-            <a:pPr algn="ctr" indent="0" marL="0">
+            <a:pPr marL="0" indent="0" algn="ctr">
               <a:buNone/>
             </a:pPr>
             <a:r>
@@ -6705,7 +6366,7 @@
           </a:bodyPr>
           <a:lstStyle/>
           <a:p>
-            <a:pPr indent="0" marL="0">
+            <a:pPr marL="0" indent="0">
               <a:buNone/>
             </a:pPr>
             <a:r>
@@ -6746,7 +6407,7 @@
           </a:bodyPr>
           <a:lstStyle/>
           <a:p>
-            <a:pPr indent="0" marL="0">
+            <a:pPr marL="0" indent="0">
               <a:buNone/>
             </a:pPr>
             <a:r>
@@ -6795,7 +6456,7 @@
           </a:bodyPr>
           <a:lstStyle/>
           <a:p>
-            <a:pPr algn="ctr" indent="0" marL="0">
+            <a:pPr marL="0" indent="0" algn="ctr">
               <a:buNone/>
             </a:pPr>
             <a:r>
@@ -6836,7 +6497,7 @@
           </a:bodyPr>
           <a:lstStyle/>
           <a:p>
-            <a:pPr indent="0" marL="0">
+            <a:pPr marL="0" indent="0">
               <a:buNone/>
             </a:pPr>
             <a:r>
@@ -6877,7 +6538,7 @@
           </a:bodyPr>
           <a:lstStyle/>
           <a:p>
-            <a:pPr indent="0" marL="0">
+            <a:pPr marL="0" indent="0">
               <a:buNone/>
             </a:pPr>
             <a:r>
@@ -6926,7 +6587,7 @@
           </a:bodyPr>
           <a:lstStyle/>
           <a:p>
-            <a:pPr algn="ctr" indent="0" marL="0">
+            <a:pPr marL="0" indent="0" algn="ctr">
               <a:buNone/>
             </a:pPr>
             <a:r>
@@ -6967,7 +6628,7 @@
           </a:bodyPr>
           <a:lstStyle/>
           <a:p>
-            <a:pPr indent="0" marL="0">
+            <a:pPr marL="0" indent="0">
               <a:buNone/>
             </a:pPr>
             <a:r>
@@ -7008,7 +6669,7 @@
           </a:bodyPr>
           <a:lstStyle/>
           <a:p>
-            <a:pPr indent="0" marL="0">
+            <a:pPr marL="0" indent="0">
               <a:buNone/>
             </a:pPr>
             <a:r>
@@ -7057,7 +6718,7 @@
           </a:bodyPr>
           <a:lstStyle/>
           <a:p>
-            <a:pPr algn="ctr" indent="0" marL="0">
+            <a:pPr marL="0" indent="0" algn="ctr">
               <a:buNone/>
             </a:pPr>
             <a:r>
@@ -7098,7 +6759,7 @@
           </a:bodyPr>
           <a:lstStyle/>
           <a:p>
-            <a:pPr indent="0" marL="0">
+            <a:pPr marL="0" indent="0">
               <a:buNone/>
             </a:pPr>
             <a:r>
@@ -7139,7 +6800,7 @@
           </a:bodyPr>
           <a:lstStyle/>
           <a:p>
-            <a:pPr indent="0" marL="0">
+            <a:pPr marL="0" indent="0">
               <a:buNone/>
             </a:pPr>
             <a:r>
@@ -7188,7 +6849,7 @@
           </a:bodyPr>
           <a:lstStyle/>
           <a:p>
-            <a:pPr algn="ctr" indent="0" marL="0">
+            <a:pPr marL="0" indent="0" algn="ctr">
               <a:buNone/>
             </a:pPr>
             <a:r>
@@ -7229,7 +6890,7 @@
           </a:bodyPr>
           <a:lstStyle/>
           <a:p>
-            <a:pPr indent="0" marL="0">
+            <a:pPr marL="0" indent="0">
               <a:buNone/>
             </a:pPr>
             <a:r>
@@ -7270,7 +6931,7 @@
           </a:bodyPr>
           <a:lstStyle/>
           <a:p>
-            <a:pPr indent="0" marL="0">
+            <a:pPr marL="0" indent="0">
               <a:buNone/>
             </a:pPr>
             <a:r>
@@ -7317,7 +6978,7 @@
           </a:bodyPr>
           <a:lstStyle/>
           <a:p>
-            <a:pPr algn="l" indent="0" marL="0">
+            <a:pPr marL="0" indent="0" algn="l">
               <a:buNone/>
             </a:pPr>
             <a:r>
@@ -7334,7 +6995,7 @@
             <a:endParaRPr lang="en-US" sz="1290" dirty="0"/>
           </a:p>
           <a:p>
-            <a:pPr algn="l" indent="0" marL="0">
+            <a:pPr marL="0" indent="0" algn="l">
               <a:buNone/>
             </a:pPr>
             <a:r>
@@ -7381,7 +7042,7 @@
           </a:bodyPr>
           <a:lstStyle/>
           <a:p>
-            <a:pPr algn="l" indent="0" marL="0">
+            <a:pPr marL="0" indent="0" algn="l">
               <a:buNone/>
             </a:pPr>
             <a:r>
@@ -7398,7 +7059,7 @@
             <a:endParaRPr lang="en-US" sz="1250" dirty="0"/>
           </a:p>
           <a:p>
-            <a:pPr algn="l" indent="0" marL="0">
+            <a:pPr marL="0" indent="0" algn="l">
               <a:buNone/>
             </a:pPr>
             <a:r>
@@ -7439,7 +7100,7 @@
           </a:bodyPr>
           <a:lstStyle/>
           <a:p>
-            <a:pPr indent="0" marL="0">
+            <a:pPr marL="0" indent="0">
               <a:buNone/>
             </a:pPr>
             <a:r>
@@ -7477,7 +7138,7 @@
           </a:prstGeom>
           <a:extLst>
             <a:ext uri="{C572A759-6A51-4108-AA02-DFA0A04FC94B}">
-              <ma14:wrappingTextBoxFlag xmlns:ma14="http://schemas.microsoft.com/office/mac/drawingml/2011/main" val="0"/>
+              <ma14:wrappingTextBoxFlag xmlns:ma14="http://schemas.microsoft.com/office/mac/drawingml/2011/main" xmlns="" val="0"/>
             </a:ext>
           </a:extLst>
         </p:spPr>
@@ -7495,7 +7156,7 @@
           <a:p>
             <a:pPr algn="l"/>
             <a:fld id="{F7021451-1387-4CA6-816F-3879F97B5CBC}" type="slidenum">
-              <a:rPr b="0" lang="en-US"/>
+              <a:rPr lang="en-US" b="0"/>
               <a:t>6</a:t>
             </a:fld>
             <a:endParaRPr lang="en-US"/>
@@ -7518,6 +7179,7 @@
         <a:solidFill>
           <a:srgbClr val="07111F"/>
         </a:solidFill>
+        <a:effectLst/>
       </p:bgPr>
     </p:bg>
     <p:spTree>
@@ -7580,7 +7242,7 @@
           </a:bodyPr>
           <a:lstStyle/>
           <a:p>
-            <a:pPr indent="0" marL="0">
+            <a:pPr marL="0" indent="0">
               <a:buNone/>
             </a:pPr>
             <a:r>
@@ -7619,7 +7281,7 @@
           <a:bodyPr wrap="square" lIns="0" tIns="0" rIns="0" bIns="0" rtlCol="0" anchor="ctr"/>
           <a:lstStyle/>
           <a:p>
-            <a:pPr algn="r" indent="0" marL="0">
+            <a:pPr marL="0" indent="0" algn="r">
               <a:buNone/>
             </a:pPr>
             <a:r>
@@ -7660,7 +7322,7 @@
           </a:bodyPr>
           <a:lstStyle/>
           <a:p>
-            <a:pPr indent="0" marL="0">
+            <a:pPr marL="0" indent="0">
               <a:buNone/>
             </a:pPr>
             <a:r>
@@ -7701,7 +7363,7 @@
           </a:bodyPr>
           <a:lstStyle/>
           <a:p>
-            <a:pPr indent="0" marL="0">
+            <a:pPr marL="0" indent="0">
               <a:buNone/>
             </a:pPr>
             <a:r>
@@ -7742,7 +7404,7 @@
           </a:bodyPr>
           <a:lstStyle/>
           <a:p>
-            <a:pPr indent="0" marL="0">
+            <a:pPr marL="0" indent="0">
               <a:buNone/>
             </a:pPr>
             <a:r>
@@ -7806,7 +7468,7 @@
           </a:bodyPr>
           <a:lstStyle/>
           <a:p>
-            <a:pPr indent="0" marL="0">
+            <a:pPr marL="0" indent="0">
               <a:buNone/>
             </a:pPr>
             <a:r>
@@ -7847,7 +7509,7 @@
           </a:bodyPr>
           <a:lstStyle/>
           <a:p>
-            <a:pPr indent="0" marL="0">
+            <a:pPr marL="0" indent="0">
               <a:buNone/>
             </a:pPr>
             <a:r>
@@ -7888,7 +7550,7 @@
           </a:bodyPr>
           <a:lstStyle/>
           <a:p>
-            <a:pPr indent="0" marL="0">
+            <a:pPr marL="0" indent="0">
               <a:buNone/>
             </a:pPr>
             <a:r>
@@ -7952,7 +7614,7 @@
           </a:bodyPr>
           <a:lstStyle/>
           <a:p>
-            <a:pPr indent="0" marL="0">
+            <a:pPr marL="0" indent="0">
               <a:buNone/>
             </a:pPr>
             <a:r>
@@ -7993,7 +7655,7 @@
           </a:bodyPr>
           <a:lstStyle/>
           <a:p>
-            <a:pPr indent="0" marL="0">
+            <a:pPr marL="0" indent="0">
               <a:buNone/>
             </a:pPr>
             <a:r>
@@ -8034,7 +7696,7 @@
           </a:bodyPr>
           <a:lstStyle/>
           <a:p>
-            <a:pPr indent="0" marL="0">
+            <a:pPr marL="0" indent="0">
               <a:buNone/>
             </a:pPr>
             <a:r>
@@ -8098,7 +7760,7 @@
           </a:bodyPr>
           <a:lstStyle/>
           <a:p>
-            <a:pPr indent="0" marL="0">
+            <a:pPr marL="0" indent="0">
               <a:buNone/>
             </a:pPr>
             <a:r>
@@ -8139,7 +7801,7 @@
           </a:bodyPr>
           <a:lstStyle/>
           <a:p>
-            <a:pPr indent="0" marL="0">
+            <a:pPr marL="0" indent="0">
               <a:buNone/>
             </a:pPr>
             <a:r>
@@ -8180,7 +7842,7 @@
           </a:bodyPr>
           <a:lstStyle/>
           <a:p>
-            <a:pPr indent="0" marL="0">
+            <a:pPr marL="0" indent="0">
               <a:buNone/>
             </a:pPr>
             <a:r>
@@ -8244,7 +7906,7 @@
           </a:bodyPr>
           <a:lstStyle/>
           <a:p>
-            <a:pPr indent="0" marL="0">
+            <a:pPr marL="0" indent="0">
               <a:buNone/>
             </a:pPr>
             <a:r>
@@ -8285,7 +7947,7 @@
           </a:bodyPr>
           <a:lstStyle/>
           <a:p>
-            <a:pPr indent="0" marL="0">
+            <a:pPr marL="0" indent="0">
               <a:buNone/>
             </a:pPr>
             <a:r>
@@ -8326,7 +7988,7 @@
           </a:bodyPr>
           <a:lstStyle/>
           <a:p>
-            <a:pPr indent="0" marL="0">
+            <a:pPr marL="0" indent="0">
               <a:buNone/>
             </a:pPr>
             <a:r>
@@ -8373,7 +8035,7 @@
           </a:bodyPr>
           <a:lstStyle/>
           <a:p>
-            <a:pPr algn="l" indent="0" marL="0">
+            <a:pPr marL="0" indent="0" algn="l">
               <a:buNone/>
             </a:pPr>
             <a:r>
@@ -8390,7 +8052,7 @@
             <a:endParaRPr lang="en-US" sz="1420" dirty="0"/>
           </a:p>
           <a:p>
-            <a:pPr algn="l" indent="0" marL="0">
+            <a:pPr marL="0" indent="0" algn="l">
               <a:buNone/>
             </a:pPr>
             <a:r>
@@ -8407,7 +8069,7 @@
             <a:endParaRPr lang="en-US" sz="1420" dirty="0"/>
           </a:p>
           <a:p>
-            <a:pPr algn="l" indent="0" marL="0">
+            <a:pPr marL="0" indent="0" algn="l">
               <a:buNone/>
             </a:pPr>
             <a:r>
@@ -8424,7 +8086,7 @@
             <a:endParaRPr lang="en-US" sz="1420" dirty="0"/>
           </a:p>
           <a:p>
-            <a:pPr algn="l" indent="0" marL="0">
+            <a:pPr marL="0" indent="0" algn="l">
               <a:buNone/>
             </a:pPr>
             <a:r>
@@ -8441,7 +8103,7 @@
             <a:endParaRPr lang="en-US" sz="1420" dirty="0"/>
           </a:p>
           <a:p>
-            <a:pPr algn="l" indent="0" marL="0">
+            <a:pPr marL="0" indent="0" algn="l">
               <a:buNone/>
             </a:pPr>
             <a:r>
@@ -8488,7 +8150,7 @@
           </a:bodyPr>
           <a:lstStyle/>
           <a:p>
-            <a:pPr algn="l" indent="0" marL="0">
+            <a:pPr marL="0" indent="0" algn="l">
               <a:buNone/>
             </a:pPr>
             <a:r>
@@ -8505,7 +8167,7 @@
             <a:endParaRPr lang="en-US" sz="1320" dirty="0"/>
           </a:p>
           <a:p>
-            <a:pPr algn="l" indent="0" marL="0">
+            <a:pPr marL="0" indent="0" algn="l">
               <a:buNone/>
             </a:pPr>
             <a:r>
@@ -8525,7 +8187,7 @@
       </p:sp>
       <p:sp>
         <p:nvSpPr>
-          <p:cNvPr id="25" name="Slide Number Placeholder 0"/>
+          <p:cNvPr id="26" name="Slide Number Placeholder 0"/>
           <p:cNvSpPr>
             <a:spLocks noGrp="1"/>
           </p:cNvSpPr>
@@ -8543,7 +8205,7 @@
           </a:prstGeom>
           <a:extLst>
             <a:ext uri="{C572A759-6A51-4108-AA02-DFA0A04FC94B}">
-              <ma14:wrappingTextBoxFlag xmlns:ma14="http://schemas.microsoft.com/office/mac/drawingml/2011/main" val="0"/>
+              <ma14:wrappingTextBoxFlag xmlns:ma14="http://schemas.microsoft.com/office/mac/drawingml/2011/main" xmlns="" val="0"/>
             </a:ext>
           </a:extLst>
         </p:spPr>
@@ -8561,7 +8223,7 @@
           <a:p>
             <a:pPr algn="l"/>
             <a:fld id="{F7021451-1387-4CA6-816F-3879F97B5CBC}" type="slidenum">
-              <a:rPr b="0" lang="en-US"/>
+              <a:rPr lang="en-US" b="0"/>
               <a:t>7</a:t>
             </a:fld>
             <a:endParaRPr lang="en-US"/>
@@ -8584,6 +8246,7 @@
         <a:solidFill>
           <a:srgbClr val="07111F"/>
         </a:solidFill>
+        <a:effectLst/>
       </p:bgPr>
     </p:bg>
     <p:spTree>
@@ -8646,7 +8309,7 @@
           </a:bodyPr>
           <a:lstStyle/>
           <a:p>
-            <a:pPr indent="0" marL="0">
+            <a:pPr marL="0" indent="0">
               <a:buNone/>
             </a:pPr>
             <a:r>
@@ -8685,7 +8348,7 @@
           <a:bodyPr wrap="square" lIns="0" tIns="0" rIns="0" bIns="0" rtlCol="0" anchor="ctr"/>
           <a:lstStyle/>
           <a:p>
-            <a:pPr algn="r" indent="0" marL="0">
+            <a:pPr marL="0" indent="0" algn="r">
               <a:buNone/>
             </a:pPr>
             <a:r>
@@ -8726,7 +8389,7 @@
           </a:bodyPr>
           <a:lstStyle/>
           <a:p>
-            <a:pPr algn="l" indent="0" marL="0">
+            <a:pPr marL="0" indent="0" algn="l">
               <a:buNone/>
             </a:pPr>
             <a:r>
@@ -8743,7 +8406,7 @@
             <a:endParaRPr lang="en-US" sz="2700" dirty="0"/>
           </a:p>
           <a:p>
-            <a:pPr algn="l" indent="0" marL="0">
+            <a:pPr marL="0" indent="0" algn="l">
               <a:buNone/>
             </a:pPr>
             <a:r>
@@ -8790,7 +8453,7 @@
           </a:bodyPr>
           <a:lstStyle/>
           <a:p>
-            <a:pPr algn="l" indent="0" marL="0">
+            <a:pPr marL="0" indent="0" algn="l">
               <a:buNone/>
             </a:pPr>
             <a:r>
@@ -8807,7 +8470,7 @@
             <a:endParaRPr lang="en-US" sz="1500" dirty="0"/>
           </a:p>
           <a:p>
-            <a:pPr algn="l" indent="0" marL="0">
+            <a:pPr marL="0" indent="0" algn="l">
               <a:buNone/>
             </a:pPr>
             <a:r>
@@ -8824,7 +8487,7 @@
             <a:endParaRPr lang="en-US" sz="1500" dirty="0"/>
           </a:p>
           <a:p>
-            <a:pPr algn="l" indent="0" marL="0">
+            <a:pPr marL="0" indent="0" algn="l">
               <a:buNone/>
             </a:pPr>
             <a:r>
@@ -8841,7 +8504,7 @@
             <a:endParaRPr lang="en-US" sz="1500" dirty="0"/>
           </a:p>
           <a:p>
-            <a:pPr algn="l" indent="0" marL="0">
+            <a:pPr marL="0" indent="0" algn="l">
               <a:buNone/>
             </a:pPr>
             <a:r>
@@ -8858,7 +8521,7 @@
             <a:endParaRPr lang="en-US" sz="1500" dirty="0"/>
           </a:p>
           <a:p>
-            <a:pPr algn="l" indent="0" marL="0">
+            <a:pPr marL="0" indent="0" algn="l">
               <a:buNone/>
             </a:pPr>
             <a:r>
@@ -8905,7 +8568,7 @@
           </a:bodyPr>
           <a:lstStyle/>
           <a:p>
-            <a:pPr algn="l" indent="0" marL="0">
+            <a:pPr marL="0" indent="0" algn="l">
               <a:buNone/>
             </a:pPr>
             <a:r>
@@ -8922,7 +8585,7 @@
             <a:endParaRPr lang="en-US" sz="1500" dirty="0"/>
           </a:p>
           <a:p>
-            <a:pPr algn="l" indent="0" marL="0">
+            <a:pPr marL="0" indent="0" algn="l">
               <a:buNone/>
             </a:pPr>
             <a:r>
@@ -8939,7 +8602,7 @@
             <a:endParaRPr lang="en-US" sz="1500" dirty="0"/>
           </a:p>
           <a:p>
-            <a:pPr algn="l" indent="0" marL="0">
+            <a:pPr marL="0" indent="0" algn="l">
               <a:buNone/>
             </a:pPr>
             <a:r>
@@ -8956,7 +8619,7 @@
             <a:endParaRPr lang="en-US" sz="1500" dirty="0"/>
           </a:p>
           <a:p>
-            <a:pPr algn="l" indent="0" marL="0">
+            <a:pPr marL="0" indent="0" algn="l">
               <a:buNone/>
             </a:pPr>
             <a:r>
@@ -8973,7 +8636,7 @@
             <a:endParaRPr lang="en-US" sz="1500" dirty="0"/>
           </a:p>
           <a:p>
-            <a:pPr algn="l" indent="0" marL="0">
+            <a:pPr marL="0" indent="0" algn="l">
               <a:buNone/>
             </a:pPr>
             <a:r>
@@ -9020,7 +8683,7 @@
           </a:bodyPr>
           <a:lstStyle/>
           <a:p>
-            <a:pPr algn="ctr" indent="0" marL="0">
+            <a:pPr marL="0" indent="0" algn="ctr">
               <a:buNone/>
             </a:pPr>
             <a:r>
@@ -9037,7 +8700,7 @@
             <a:endParaRPr lang="en-US" sz="1500" dirty="0"/>
           </a:p>
           <a:p>
-            <a:pPr algn="ctr" indent="0" marL="0">
+            <a:pPr marL="0" indent="0" algn="ctr">
               <a:buNone/>
             </a:pPr>
             <a:r>
@@ -9076,7 +8739,7 @@
           <a:bodyPr wrap="square" lIns="0" tIns="0" rIns="0" bIns="0" rtlCol="0" anchor="ctr"/>
           <a:lstStyle/>
           <a:p>
-            <a:pPr indent="0" marL="0">
+            <a:pPr marL="0" indent="0">
               <a:buNone/>
             </a:pPr>
             <a:r>
@@ -9117,7 +8780,7 @@
           </a:bodyPr>
           <a:lstStyle/>
           <a:p>
-            <a:pPr indent="0" marL="0">
+            <a:pPr marL="0" indent="0">
               <a:buNone/>
             </a:pPr>
             <a:r>
@@ -9155,7 +8818,7 @@
           </a:prstGeom>
           <a:extLst>
             <a:ext uri="{C572A759-6A51-4108-AA02-DFA0A04FC94B}">
-              <ma14:wrappingTextBoxFlag xmlns:ma14="http://schemas.microsoft.com/office/mac/drawingml/2011/main" val="0"/>
+              <ma14:wrappingTextBoxFlag xmlns:ma14="http://schemas.microsoft.com/office/mac/drawingml/2011/main" xmlns="" val="0"/>
             </a:ext>
           </a:extLst>
         </p:spPr>
@@ -9173,7 +8836,7 @@
           <a:p>
             <a:pPr algn="l"/>
             <a:fld id="{F7021451-1387-4CA6-816F-3879F97B5CBC}" type="slidenum">
-              <a:rPr b="0" lang="en-US"/>
+              <a:rPr lang="en-US" b="0"/>
               <a:t>8</a:t>
             </a:fld>
             <a:endParaRPr lang="en-US"/>
@@ -9196,6 +8859,7 @@
         <a:solidFill>
           <a:srgbClr val="07111F"/>
         </a:solidFill>
+        <a:effectLst/>
       </p:bgPr>
     </p:bg>
     <p:spTree>
@@ -9258,7 +8922,7 @@
           </a:bodyPr>
           <a:lstStyle/>
           <a:p>
-            <a:pPr indent="0" marL="0">
+            <a:pPr marL="0" indent="0">
               <a:buNone/>
             </a:pPr>
             <a:r>
@@ -9297,7 +8961,7 @@
           <a:bodyPr wrap="square" lIns="0" tIns="0" rIns="0" bIns="0" rtlCol="0" anchor="ctr"/>
           <a:lstStyle/>
           <a:p>
-            <a:pPr algn="r" indent="0" marL="0">
+            <a:pPr marL="0" indent="0" algn="r">
               <a:buNone/>
             </a:pPr>
             <a:r>
@@ -9338,7 +9002,7 @@
           </a:bodyPr>
           <a:lstStyle/>
           <a:p>
-            <a:pPr indent="0" marL="0">
+            <a:pPr marL="0" indent="0">
               <a:buNone/>
             </a:pPr>
             <a:r>
@@ -9379,7 +9043,7 @@
           </a:bodyPr>
           <a:lstStyle/>
           <a:p>
-            <a:pPr indent="0" marL="0">
+            <a:pPr marL="0" indent="0">
               <a:buNone/>
             </a:pPr>
             <a:r>
@@ -9443,7 +9107,7 @@
           </a:bodyPr>
           <a:lstStyle/>
           <a:p>
-            <a:pPr indent="0" marL="0">
+            <a:pPr marL="0" indent="0">
               <a:buNone/>
             </a:pPr>
             <a:r>
@@ -9484,7 +9148,7 @@
           </a:bodyPr>
           <a:lstStyle/>
           <a:p>
-            <a:pPr indent="0" marL="0">
+            <a:pPr marL="0" indent="0">
               <a:buNone/>
             </a:pPr>
             <a:r>
@@ -9548,7 +9212,7 @@
           </a:bodyPr>
           <a:lstStyle/>
           <a:p>
-            <a:pPr indent="0" marL="0">
+            <a:pPr marL="0" indent="0">
               <a:buNone/>
             </a:pPr>
             <a:r>
@@ -9589,7 +9253,7 @@
           </a:bodyPr>
           <a:lstStyle/>
           <a:p>
-            <a:pPr indent="0" marL="0">
+            <a:pPr marL="0" indent="0">
               <a:buNone/>
             </a:pPr>
             <a:r>
@@ -9653,7 +9317,7 @@
           </a:bodyPr>
           <a:lstStyle/>
           <a:p>
-            <a:pPr indent="0" marL="0">
+            <a:pPr marL="0" indent="0">
               <a:buNone/>
             </a:pPr>
             <a:r>
@@ -9694,7 +9358,7 @@
           </a:bodyPr>
           <a:lstStyle/>
           <a:p>
-            <a:pPr indent="0" marL="0">
+            <a:pPr marL="0" indent="0">
               <a:buNone/>
             </a:pPr>
             <a:r>
@@ -9758,7 +9422,7 @@
           </a:bodyPr>
           <a:lstStyle/>
           <a:p>
-            <a:pPr indent="0" marL="0">
+            <a:pPr marL="0" indent="0">
               <a:buNone/>
             </a:pPr>
             <a:r>
@@ -9799,7 +9463,7 @@
           </a:bodyPr>
           <a:lstStyle/>
           <a:p>
-            <a:pPr indent="0" marL="0">
+            <a:pPr marL="0" indent="0">
               <a:buNone/>
             </a:pPr>
             <a:r>
@@ -9837,7 +9501,7 @@
           </a:prstGeom>
           <a:extLst>
             <a:ext uri="{C572A759-6A51-4108-AA02-DFA0A04FC94B}">
-              <ma14:wrappingTextBoxFlag xmlns:ma14="http://schemas.microsoft.com/office/mac/drawingml/2011/main" val="0"/>
+              <ma14:wrappingTextBoxFlag xmlns:ma14="http://schemas.microsoft.com/office/mac/drawingml/2011/main" xmlns="" val="0"/>
             </a:ext>
           </a:extLst>
         </p:spPr>
@@ -9855,7 +9519,7 @@
           <a:p>
             <a:pPr algn="l"/>
             <a:fld id="{F7021451-1387-4CA6-816F-3879F97B5CBC}" type="slidenum">
-              <a:rPr b="0" lang="en-US"/>
+              <a:rPr lang="en-US" b="0"/>
               <a:t>9</a:t>
             </a:fld>
             <a:endParaRPr lang="en-US"/>
@@ -10163,4 +9827,299 @@
     </a:ext>
   </a:extLst>
 </a:theme>
+</file>
+
+<file path=ppt/theme/theme2.xml><?xml version="1.0" encoding="utf-8"?>
+<a:theme xmlns:a="http://schemas.openxmlformats.org/drawingml/2006/main" name="Тема Office">
+  <a:themeElements>
+    <a:clrScheme name="Стандартная">
+      <a:dk1>
+        <a:sysClr val="windowText" lastClr="000000"/>
+      </a:dk1>
+      <a:lt1>
+        <a:sysClr val="window" lastClr="FFFFFF"/>
+      </a:lt1>
+      <a:dk2>
+        <a:srgbClr val="44546A"/>
+      </a:dk2>
+      <a:lt2>
+        <a:srgbClr val="E7E6E6"/>
+      </a:lt2>
+      <a:accent1>
+        <a:srgbClr val="4472C4"/>
+      </a:accent1>
+      <a:accent2>
+        <a:srgbClr val="ED7D31"/>
+      </a:accent2>
+      <a:accent3>
+        <a:srgbClr val="A5A5A5"/>
+      </a:accent3>
+      <a:accent4>
+        <a:srgbClr val="FFC000"/>
+      </a:accent4>
+      <a:accent5>
+        <a:srgbClr val="5B9BD5"/>
+      </a:accent5>
+      <a:accent6>
+        <a:srgbClr val="70AD47"/>
+      </a:accent6>
+      <a:hlink>
+        <a:srgbClr val="0563C1"/>
+      </a:hlink>
+      <a:folHlink>
+        <a:srgbClr val="954F72"/>
+      </a:folHlink>
+    </a:clrScheme>
+    <a:fontScheme name="Стандартная">
+      <a:majorFont>
+        <a:latin typeface="Calibri Light" panose="020F0302020204030204"/>
+        <a:ea typeface=""/>
+        <a:cs typeface=""/>
+        <a:font script="Jpan" typeface="游ゴシック Light"/>
+        <a:font script="Hang" typeface="맑은 고딕"/>
+        <a:font script="Hans" typeface="等线 Light"/>
+        <a:font script="Hant" typeface="新細明體"/>
+        <a:font script="Arab" typeface="Times New Roman"/>
+        <a:font script="Hebr" typeface="Times New Roman"/>
+        <a:font script="Thai" typeface="Angsana New"/>
+        <a:font script="Ethi" typeface="Nyala"/>
+        <a:font script="Beng" typeface="Vrinda"/>
+        <a:font script="Gujr" typeface="Shruti"/>
+        <a:font script="Khmr" typeface="MoolBoran"/>
+        <a:font script="Knda" typeface="Tunga"/>
+        <a:font script="Guru" typeface="Raavi"/>
+        <a:font script="Cans" typeface="Euphemia"/>
+        <a:font script="Cher" typeface="Plantagenet Cherokee"/>
+        <a:font script="Yiii" typeface="Microsoft Yi Baiti"/>
+        <a:font script="Tibt" typeface="Microsoft Himalaya"/>
+        <a:font script="Thaa" typeface="MV Boli"/>
+        <a:font script="Deva" typeface="Mangal"/>
+        <a:font script="Telu" typeface="Gautami"/>
+        <a:font script="Taml" typeface="Latha"/>
+        <a:font script="Syrc" typeface="Estrangelo Edessa"/>
+        <a:font script="Orya" typeface="Kalinga"/>
+        <a:font script="Mlym" typeface="Kartika"/>
+        <a:font script="Laoo" typeface="DokChampa"/>
+        <a:font script="Sinh" typeface="Iskoola Pota"/>
+        <a:font script="Mong" typeface="Mongolian Baiti"/>
+        <a:font script="Viet" typeface="Times New Roman"/>
+        <a:font script="Uigh" typeface="Microsoft Uighur"/>
+        <a:font script="Geor" typeface="Sylfaen"/>
+        <a:font script="Armn" typeface="Arial"/>
+        <a:font script="Bugi" typeface="Leelawadee UI"/>
+        <a:font script="Bopo" typeface="Microsoft JhengHei"/>
+        <a:font script="Java" typeface="Javanese Text"/>
+        <a:font script="Lisu" typeface="Segoe UI"/>
+        <a:font script="Mymr" typeface="Myanmar Text"/>
+        <a:font script="Nkoo" typeface="Ebrima"/>
+        <a:font script="Olck" typeface="Nirmala UI"/>
+        <a:font script="Osma" typeface="Ebrima"/>
+        <a:font script="Phag" typeface="Phagspa"/>
+        <a:font script="Syrn" typeface="Estrangelo Edessa"/>
+        <a:font script="Syrj" typeface="Estrangelo Edessa"/>
+        <a:font script="Syre" typeface="Estrangelo Edessa"/>
+        <a:font script="Sora" typeface="Nirmala UI"/>
+        <a:font script="Tale" typeface="Microsoft Tai Le"/>
+        <a:font script="Talu" typeface="Microsoft New Tai Lue"/>
+        <a:font script="Tfng" typeface="Ebrima"/>
+      </a:majorFont>
+      <a:minorFont>
+        <a:latin typeface="Calibri" panose="020F0502020204030204"/>
+        <a:ea typeface=""/>
+        <a:cs typeface=""/>
+        <a:font script="Jpan" typeface="游ゴシック"/>
+        <a:font script="Hang" typeface="맑은 고딕"/>
+        <a:font script="Hans" typeface="等线"/>
+        <a:font script="Hant" typeface="新細明體"/>
+        <a:font script="Arab" typeface="Arial"/>
+        <a:font script="Hebr" typeface="Arial"/>
+        <a:font script="Thai" typeface="Cordia New"/>
+        <a:font script="Ethi" typeface="Nyala"/>
+        <a:font script="Beng" typeface="Vrinda"/>
+        <a:font script="Gujr" typeface="Shruti"/>
+        <a:font script="Khmr" typeface="DaunPenh"/>
+        <a:font script="Knda" typeface="Tunga"/>
+        <a:font script="Guru" typeface="Raavi"/>
+        <a:font script="Cans" typeface="Euphemia"/>
+        <a:font script="Cher" typeface="Plantagenet Cherokee"/>
+        <a:font script="Yiii" typeface="Microsoft Yi Baiti"/>
+        <a:font script="Tibt" typeface="Microsoft Himalaya"/>
+        <a:font script="Thaa" typeface="MV Boli"/>
+        <a:font script="Deva" typeface="Mangal"/>
+        <a:font script="Telu" typeface="Gautami"/>
+        <a:font script="Taml" typeface="Latha"/>
+        <a:font script="Syrc" typeface="Estrangelo Edessa"/>
+        <a:font script="Orya" typeface="Kalinga"/>
+        <a:font script="Mlym" typeface="Kartika"/>
+        <a:font script="Laoo" typeface="DokChampa"/>
+        <a:font script="Sinh" typeface="Iskoola Pota"/>
+        <a:font script="Mong" typeface="Mongolian Baiti"/>
+        <a:font script="Viet" typeface="Arial"/>
+        <a:font script="Uigh" typeface="Microsoft Uighur"/>
+        <a:font script="Geor" typeface="Sylfaen"/>
+        <a:font script="Armn" typeface="Arial"/>
+        <a:font script="Bugi" typeface="Leelawadee UI"/>
+        <a:font script="Bopo" typeface="Microsoft JhengHei"/>
+        <a:font script="Java" typeface="Javanese Text"/>
+        <a:font script="Lisu" typeface="Segoe UI"/>
+        <a:font script="Mymr" typeface="Myanmar Text"/>
+        <a:font script="Nkoo" typeface="Ebrima"/>
+        <a:font script="Olck" typeface="Nirmala UI"/>
+        <a:font script="Osma" typeface="Ebrima"/>
+        <a:font script="Phag" typeface="Phagspa"/>
+        <a:font script="Syrn" typeface="Estrangelo Edessa"/>
+        <a:font script="Syrj" typeface="Estrangelo Edessa"/>
+        <a:font script="Syre" typeface="Estrangelo Edessa"/>
+        <a:font script="Sora" typeface="Nirmala UI"/>
+        <a:font script="Tale" typeface="Microsoft Tai Le"/>
+        <a:font script="Talu" typeface="Microsoft New Tai Lue"/>
+        <a:font script="Tfng" typeface="Ebrima"/>
+      </a:minorFont>
+    </a:fontScheme>
+    <a:fmtScheme name="Стандартная">
+      <a:fillStyleLst>
+        <a:solidFill>
+          <a:schemeClr val="phClr"/>
+        </a:solidFill>
+        <a:gradFill rotWithShape="1">
+          <a:gsLst>
+            <a:gs pos="0">
+              <a:schemeClr val="phClr">
+                <a:lumMod val="110000"/>
+                <a:satMod val="105000"/>
+                <a:tint val="67000"/>
+              </a:schemeClr>
+            </a:gs>
+            <a:gs pos="50000">
+              <a:schemeClr val="phClr">
+                <a:lumMod val="105000"/>
+                <a:satMod val="103000"/>
+                <a:tint val="73000"/>
+              </a:schemeClr>
+            </a:gs>
+            <a:gs pos="100000">
+              <a:schemeClr val="phClr">
+                <a:lumMod val="105000"/>
+                <a:satMod val="109000"/>
+                <a:tint val="81000"/>
+              </a:schemeClr>
+            </a:gs>
+          </a:gsLst>
+          <a:lin ang="5400000" scaled="0"/>
+        </a:gradFill>
+        <a:gradFill rotWithShape="1">
+          <a:gsLst>
+            <a:gs pos="0">
+              <a:schemeClr val="phClr">
+                <a:satMod val="103000"/>
+                <a:lumMod val="102000"/>
+                <a:tint val="94000"/>
+              </a:schemeClr>
+            </a:gs>
+            <a:gs pos="50000">
+              <a:schemeClr val="phClr">
+                <a:satMod val="110000"/>
+                <a:lumMod val="100000"/>
+                <a:shade val="100000"/>
+              </a:schemeClr>
+            </a:gs>
+            <a:gs pos="100000">
+              <a:schemeClr val="phClr">
+                <a:lumMod val="99000"/>
+                <a:satMod val="120000"/>
+                <a:shade val="78000"/>
+              </a:schemeClr>
+            </a:gs>
+          </a:gsLst>
+          <a:lin ang="5400000" scaled="0"/>
+        </a:gradFill>
+      </a:fillStyleLst>
+      <a:lnStyleLst>
+        <a:ln w="6350" cap="flat" cmpd="sng" algn="ctr">
+          <a:solidFill>
+            <a:schemeClr val="phClr"/>
+          </a:solidFill>
+          <a:prstDash val="solid"/>
+          <a:miter lim="800000"/>
+        </a:ln>
+        <a:ln w="12700" cap="flat" cmpd="sng" algn="ctr">
+          <a:solidFill>
+            <a:schemeClr val="phClr"/>
+          </a:solidFill>
+          <a:prstDash val="solid"/>
+          <a:miter lim="800000"/>
+        </a:ln>
+        <a:ln w="19050" cap="flat" cmpd="sng" algn="ctr">
+          <a:solidFill>
+            <a:schemeClr val="phClr"/>
+          </a:solidFill>
+          <a:prstDash val="solid"/>
+          <a:miter lim="800000"/>
+        </a:ln>
+      </a:lnStyleLst>
+      <a:effectStyleLst>
+        <a:effectStyle>
+          <a:effectLst/>
+        </a:effectStyle>
+        <a:effectStyle>
+          <a:effectLst/>
+        </a:effectStyle>
+        <a:effectStyle>
+          <a:effectLst>
+            <a:outerShdw blurRad="57150" dist="19050" dir="5400000" algn="ctr" rotWithShape="0">
+              <a:srgbClr val="000000">
+                <a:alpha val="63000"/>
+              </a:srgbClr>
+            </a:outerShdw>
+          </a:effectLst>
+        </a:effectStyle>
+      </a:effectStyleLst>
+      <a:bgFillStyleLst>
+        <a:solidFill>
+          <a:schemeClr val="phClr"/>
+        </a:solidFill>
+        <a:solidFill>
+          <a:schemeClr val="phClr">
+            <a:tint val="95000"/>
+            <a:satMod val="170000"/>
+          </a:schemeClr>
+        </a:solidFill>
+        <a:gradFill rotWithShape="1">
+          <a:gsLst>
+            <a:gs pos="0">
+              <a:schemeClr val="phClr">
+                <a:tint val="93000"/>
+                <a:satMod val="150000"/>
+                <a:shade val="98000"/>
+                <a:lumMod val="102000"/>
+              </a:schemeClr>
+            </a:gs>
+            <a:gs pos="50000">
+              <a:schemeClr val="phClr">
+                <a:tint val="98000"/>
+                <a:satMod val="130000"/>
+                <a:shade val="90000"/>
+                <a:lumMod val="103000"/>
+              </a:schemeClr>
+            </a:gs>
+            <a:gs pos="100000">
+              <a:schemeClr val="phClr">
+                <a:shade val="63000"/>
+                <a:satMod val="120000"/>
+              </a:schemeClr>
+            </a:gs>
+          </a:gsLst>
+          <a:lin ang="5400000" scaled="0"/>
+        </a:gradFill>
+      </a:bgFillStyleLst>
+    </a:fmtScheme>
+  </a:themeElements>
+  <a:objectDefaults/>
+  <a:extraClrSchemeLst/>
+  <a:extLst>
+    <a:ext uri="{05A4C25C-085E-4340-85A3-A5531E510DB2}">
+      <thm15:themeFamily xmlns:thm15="http://schemas.microsoft.com/office/thememl/2012/main" name="Office Theme" id="{62F939B6-93AF-4DB8-9C6B-D6C7DFDC589F}" vid="{4A3C46E8-61CC-4603-A589-7422A47A8E4A}"/>
+    </a:ext>
+  </a:extLst>
+</a:theme>
 </file>